--- a/Compile_safe_code_with_Visitor_pattern.pptx
+++ b/Compile_safe_code_with_Visitor_pattern.pptx
@@ -15812,7 +15812,7 @@
           </a:ln>
           <a:extLst>
             <a:ext uri="{C572A759-6A51-4108-AA02-DFA0A04FC94B}">
-              <ma14:wrappingTextBoxFlag xmlns:ma14="http://schemas.microsoft.com/office/mac/drawingml/2011/main" xmlns="" val="1"/>
+              <ma14:wrappingTextBoxFlag xmlns="" xmlns:ma14="http://schemas.microsoft.com/office/mac/drawingml/2011/main" val="1"/>
             </a:ext>
           </a:extLst>
         </p:spPr>
@@ -34239,7 +34239,7 @@
           </a:ln>
           <a:extLst>
             <a:ext uri="{C572A759-6A51-4108-AA02-DFA0A04FC94B}">
-              <ma14:wrappingTextBoxFlag xmlns="" xmlns:ma14="http://schemas.microsoft.com/office/mac/drawingml/2011/main" val="1"/>
+              <ma14:wrappingTextBoxFlag xmlns:ma14="http://schemas.microsoft.com/office/mac/drawingml/2011/main" xmlns="" val="1"/>
             </a:ext>
           </a:extLst>
         </p:spPr>
@@ -48218,10 +48218,10 @@
           <a:lstStyle/>
           <a:p>
             <a:r>
-              <a:rPr lang="en-US" dirty="0">
+              <a:rPr lang="en-US">
                 <a:hlinkClick r:id="rId2"/>
               </a:rPr>
-              <a:t>https://git.epam.com/gedotnet/design-patterns/dp-visitor-talk</a:t>
+              <a:t>https://git.epam.com/gedotnet/design-patterns/visitor</a:t>
             </a:r>
             <a:endParaRPr lang="ru-RU" dirty="0"/>
           </a:p>
@@ -50220,257 +50220,14 @@
 
 <file path=customXml/item1.xml><?xml version="1.0" encoding="utf-8"?>
 <?mso-contentType ?>
-<spe:Receivers xmlns:spe="http://schemas.microsoft.com/sharepoint/events">
-  <Receiver>
-    <Name>Document ID Generator</Name>
-    <Synchronization>Synchronous</Synchronization>
-    <Type>10001</Type>
-    <SequenceNumber>1000</SequenceNumber>
-    <Url/>
-    <Assembly>Microsoft.Office.DocumentManagement, Version=16.0.0.0, Culture=neutral, PublicKeyToken=71e9bce111e9429c</Assembly>
-    <Class>Microsoft.Office.DocumentManagement.Internal.DocIdHandler</Class>
-    <Data/>
-    <Filter/>
-  </Receiver>
-  <Receiver>
-    <Name>Document ID Generator</Name>
-    <Synchronization>Synchronous</Synchronization>
-    <Type>10002</Type>
-    <SequenceNumber>1001</SequenceNumber>
-    <Url/>
-    <Assembly>Microsoft.Office.DocumentManagement, Version=16.0.0.0, Culture=neutral, PublicKeyToken=71e9bce111e9429c</Assembly>
-    <Class>Microsoft.Office.DocumentManagement.Internal.DocIdHandler</Class>
-    <Data/>
-    <Filter/>
-  </Receiver>
-  <Receiver>
-    <Name>Document ID Generator</Name>
-    <Synchronization>Synchronous</Synchronization>
-    <Type>10004</Type>
-    <SequenceNumber>1002</SequenceNumber>
-    <Url/>
-    <Assembly>Microsoft.Office.DocumentManagement, Version=16.0.0.0, Culture=neutral, PublicKeyToken=71e9bce111e9429c</Assembly>
-    <Class>Microsoft.Office.DocumentManagement.Internal.DocIdHandler</Class>
-    <Data/>
-    <Filter/>
-  </Receiver>
-  <Receiver>
-    <Name>Document ID Generator</Name>
-    <Synchronization>Synchronous</Synchronization>
-    <Type>10006</Type>
-    <SequenceNumber>1003</SequenceNumber>
-    <Url/>
-    <Assembly>Microsoft.Office.DocumentManagement, Version=16.0.0.0, Culture=neutral, PublicKeyToken=71e9bce111e9429c</Assembly>
-    <Class>Microsoft.Office.DocumentManagement.Internal.DocIdHandler</Class>
-    <Data/>
-    <Filter/>
-  </Receiver>
-</spe:Receivers>
+<FormTemplates xmlns="http://schemas.microsoft.com/sharepoint/v3/contenttype/forms">
+  <Display>DocumentLibraryForm</Display>
+  <Edit>DocumentLibraryForm</Edit>
+  <New>DocumentLibraryForm</New>
+</FormTemplates>
 </file>
 
 <file path=customXml/item2.xml><?xml version="1.0" encoding="utf-8"?>
-<p:properties xmlns:p="http://schemas.microsoft.com/office/2006/metadata/properties" xmlns:xsi="http://www.w3.org/2001/XMLSchema-instance" xmlns:pc="http://schemas.microsoft.com/office/infopath/2007/PartnerControls">
-  <documentManagement>
-    <_dlc_DocIdPersistId xmlns="2f73596d-a490-4938-9ae7-6f2abd4edc7d" xsi:nil="true"/>
-    <_dlc_DocIdUrl xmlns="2f73596d-a490-4938-9ae7-6f2abd4edc7d">
-      <Url>https://epam.sharepoint.com/sites/policy/_layouts/15/DocIdRedir.aspx?ID=EPAM-1788376749-106</Url>
-      <Description>EPAM-1788376749-106</Description>
-    </_dlc_DocIdUrl>
-    <_dlc_DocId xmlns="2f73596d-a490-4938-9ae7-6f2abd4edc7d">EPAM-1788376749-106</_dlc_DocId>
-    <Company xmlns="http://schemas.microsoft.com/sharepoint/v3" xsi:nil="true"/>
-    <DocumentArea xmlns="a17c10a8-bd22-4f4b-9c5c-c3dc02494c46">
-      <Value>Maintenance and Support</Value>
-    </DocumentArea>
-    <Subarea xmlns="a17c10a8-bd22-4f4b-9c5c-c3dc02494c46">###</Subarea>
-    <Document_x0020_Approver_x0020__x0028_position_x0029_ xmlns="a17c10a8-bd22-4f4b-9c5c-c3dc02494c46">Senior Director, Delivery Management Office</Document_x0020_Approver_x0020__x0028_position_x0029_>
-    <Document_x0020_Owner_x0020__x0028_position_x0029_ xmlns="a17c10a8-bd22-4f4b-9c5c-c3dc02494c46">Head of Global Delivery</Document_x0020_Owner_x0020__x0028_position_x0029_>
-    <EPAMDocumentID_x0020_ xmlns="a17c10a8-bd22-4f4b-9c5c-c3dc02494c46">EPAM_Template-1203</EPAMDocumentID_x0020_>
-    <TemplatesTextContent xmlns="a17c10a8-bd22-4f4b-9c5c-c3dc02494c46">IT SERVICES MONTHLY REVIEW 
-Reported period : &lt;month, year &gt;
-CONFIDENTIAL  |  
-© 
-2024
- EPAM Systems, Inc.
-IT SERVICE HEALTH : SERVICE VOLUME
-&lt;Diagram with all user’s and monitoring  incidents during reported period ; including count of incidents and resolver assignment group&gt;
-IT SERVICE HEALTH : SERVICE VOLUME
-&lt;Diagram with all service requests during reported period, should include numbers of all INC and SRs tickets during this period.​
-Business meaning:​
-These numbers represent unique tasks that came to each team and required attention and effort.​
-Proposed actions / decisions:​
-Analyzing volume trends correlating with major events;​
-Volume spikes after major events may indicate the need for further research of systemic root causes. &gt;
-3
-Tower (top10)
-Created INC/SR during &lt;repot period&gt;
-Created INC/SR during &lt;repot period&gt;
-Trend
-&lt;Assignment group&gt;
-&lt;number or INC/SR&gt;
-&lt;number or INC/SR&gt;
-&lt;increase / decrease &gt;
-&lt;Assignment group&gt;
-&lt;number or INC/SR&gt;
-&lt;number or INC/SR&gt;
-IT SERVICE HEALTH: &lt;Project&gt; SERVICE VOLUME
-&lt;Diagram with all user’s and monitoring  incidents during reported period for a specific project (not including services covered  by client); including count of incidents and resolver assignment group
-4
-Business meaning:​
-These numbers represent unique tasks that came to each team and required attention and effort.​
-Proposed actions / decisions:​
-Analyzing volume trends correlating with major events;​
-Volume spikes after major events may indicate the need for further research of systemic root causes. &gt;
-IT SERVICE HEALTH: &lt;Project&gt; SERVICE VOLUME
-&lt;Diagram with ALL service requests (opened, resolved, closed) related  to a specific project &gt;
-Business meaning:​
-These numbers represent unique tasks that came to each team and required attention and effort.​
-Proposed actions / decisions:​
-Analyzing volume trends correlating with major events;​
-The number of increased/decreased tickers should be specified, and possible action items proposed.
-5
-6
-IT SERVICE HEALTH: &lt;Project/Team&gt; Incidents’ SLAs
-&lt;Examples&gt;
-Business meaning:​
-This stats will show whether Response and Resolution SLA are within SLA
-.​
-Proposed actions / decisions:​
-Analyzing SLA breaching
-Keep SLAs calibration and monitoring 
-SLA targets:
-&lt;Specify SLA targets for different priority levels &gt;
-&lt;Diagram with Average time for processing different types of priority levels incidents, should contain Average time for processing P1-P4 Incidents &gt;
-7
-IT SERVICE HEALTH: &lt;Project/team&gt; Incidents’ SLAs
-Business meaning:​
-This stats will show whether Response and Resolution SLA are within SLA for different priority levels
-Proposed actions / decisions:​
-Analyzing SLA breaching 
-Keep SLAs calibration and monitoring
-SLA targets:
-P1 &lt;should be specified for each one&gt;
-P2
-P3
-P4
-IT SERVICE HEALTH: &lt;Team/Project&gt; INCs’ and SRs’ SLA 
-8
-&lt;insert the following diagrams/ statistics charts:
-Average processing time for Service Requests, Resolution time for Service requests, Ticket resolution quality 
-Reassignment Compliance&gt;
-Business meaning:​
-This stats will show whether Average processing time of Service Requests is healthy; Reassignment Compliance and Ticket resolution quality (number of reopen)
-Proposed actions / decisions:​
-Analyzing service volume and propose action items if required
-IT SERVICE HEALTH: P0/P1 INCIDENTS
-&lt;Diagram with closed P0/P1 incidents grouped by resolver group&gt;
-P0/P1ticket
-SLA Breached
-Team
-Short Description
-RCA
-Prevention/Mitigation
-9
-Business meaning:​
-These numbers show how many tickets of different Priority are resolved by each group and may provide better understanding of the complexity of incidents,
-Actions / decisions:​
-Analyzing &lt;Analyzing trends may drive DEV effort prioritization of “code improvements” vs “feature development&gt;  &lt;stability of Code , structure , code&gt;
-IT SERVICE HEALTH: TICKET AGE
-&lt;Diagram with all open incidents grouped by Backlog time and diagram with all open incidents grouped by Backlog time and priority: grouped by the following statuses : New, In Progress, On Hold &gt;
-Tower (top 10)
-Age (1+ month)
-10
-Business meaning:​
-Displays the number of days tickets have been open in the system. &lt;open tasks, backlog&gt;
-Actions / decisions:​
-&lt;for future Problem Management &gt;
-IT SERVICE Customer Satisfaction (CSAT)
-&lt;Diagram with statistics and trend line&gt;
-11
-Business meaning:​
-Customer satisfaction and score that indicates how satisfied a customer is with a specific product, transaction, or interaction with a company
-Actions / decisions:​
-Regular monthly CSAT Review 
-SERVICE TOWER: SERVICE DESK
-&lt;only if required &gt;
-Service Volume
-&lt;D
-iagram with total number of Tickets created in ITSM tool vs Tickets accepted by L1 vs First Level resolution (FLR) tickets
-Service SLAs
-&lt;
-Service Desk first call resolution rate of  level 1Support (True/ falls)
-Response SLA for L1 team (True/ falls)
-Tickets Age
-&lt;diagram  with all Open INC+ SR grouped by Backlog time and State (Pending, Open, Work in progress) for L1 Team&gt;
-12
-Key Highlights 
-&lt;specify for reported period &gt;
-Critical issues 
-&lt;specify for reported period &gt;
-SLA target
-&lt;specify for reported period &gt;
-SERVICE TOWER: CHANGE MANAGEMENT 
-&lt;Diagram with all changes groups by statuses which are in ITSM tool&gt;
-13
-Business meaning 
-The number of RFCs
-Actions / decisions:​
-SERVICE TOWER :PROBLEM MANAGEMENT
-&lt;Diagram with all problems groups by statuses which are in ITSM tool&gt;
-14
-Business meaning 
-These numbers may provide better understanding of the complexity of incidents, stability of Code, and overall health of environment 
-Actions / decisions:​
-RISKS
-&lt;Mention all possible risks grouped by a separate tower of service (Service Desk, Change / INC/Problem Management , Different teams within the project )&gt;
-15
-Risks
-Risk Owner
-Impact 
-Description/Impact
-Mitigation
-IT SERVICE IMPROVEMENTS (CSIP)
-Short Description 
-Owner
-Impact
-Date
-16
-Completed This Month
-Planned Next Month 
-Short Description 
-Owner
-Impact
-Date
-THANK YOU!
-17
-</TemplatesTextContent>
-    <SubjectDoc xmlns="a17c10a8-bd22-4f4b-9c5c-c3dc02494c46">Template</SubjectDoc>
-    <FriendlyURL xmlns="a17c10a8-bd22-4f4b-9c5c-c3dc02494c46">files/templates-examples/global-delivery/monthly-review-report.pptx</FriendlyURL>
-    <BriefDescription xmlns="a17c10a8-bd22-4f4b-9c5c-c3dc02494c46">This template is related to Maintenance and Support Guideline and intended to be used for monthly status reporting of maintenance and support project.</BriefDescription>
-    <WorkStorage xmlns="a17c10a8-bd22-4f4b-9c5c-c3dc02494c46">
-      <Url>https://epam.sharepoint.com/sites/policy/work/Shared%20Documents/Work%20Product%20Templates/Continuous%20delivery/Maintenance%20and%20Support</Url>
-      <Description>/sites/policy/work/Shared Documents/Work Product Templates/Continuous delivery/Maintenance and Support</Description>
-    </WorkStorage>
-    <PageName xmlns="a17c10a8-bd22-4f4b-9c5c-c3dc02494c46">
-      <Url>https://policy.epam.com/pages/templates-examples/monthly-review-report</Url>
-      <Description>Template: Monthly Review Report</Description>
-    </PageName>
-    <OrganizationalUnit xmlns="a17c10a8-bd22-4f4b-9c5c-c3dc02494c46">
-      <Url>https://people.epam.com/network/1/8aec5375-fd5e-4dd5-aa02-b9d225a43413/structure</Url>
-      <Description>Delivery Management Office</Description>
-    </OrganizationalUnit>
-    <LocationCountry xmlns="a17c10a8-bd22-4f4b-9c5c-c3dc02494c46">
-      <Value>Global</Value>
-    </LocationCountry>
-    <LastApprovalDate xmlns="a17c10a8-bd22-4f4b-9c5c-c3dc02494c46">2022-12-20T21:00:00+00:00</LastApprovalDate>
-    <LastApproverName xmlns="a17c10a8-bd22-4f4b-9c5c-c3dc02494c46">Dmitry Makeev</LastApproverName>
-    <Standards xmlns="a17c10a8-bd22-4f4b-9c5c-c3dc02494c46">
-      <Value>###</Value>
-    </Standards>
-  </documentManagement>
-</p:properties>
-</file>
-
-<file path=customXml/item3.xml><?xml version="1.0" encoding="utf-8"?>
 <ct:contentTypeSchema xmlns:ct="http://schemas.microsoft.com/office/2006/metadata/contentType" xmlns:ma="http://schemas.microsoft.com/office/2006/metadata/properties/metaAttributes" ct:_="" ma:_="" ma:contentTypeName="EPAM Template" ma:contentTypeID="0x0101006F5799D5350E4747858630C5700DFDF00046CFA168D8AB1B4D937A734D2015792B" ma:contentTypeVersion="4" ma:contentTypeDescription="ECL EPAM Template CT" ma:contentTypeScope="" ma:versionID="3e46c49967fe6bc1ef07a9a4e4763266">
   <xsd:schema xmlns:xsd="http://www.w3.org/2001/XMLSchema" xmlns:xs="http://www.w3.org/2001/XMLSchema" xmlns:p="http://schemas.microsoft.com/office/2006/metadata/properties" xmlns:ns1="http://schemas.microsoft.com/sharepoint/v3" xmlns:ns2="a17c10a8-bd22-4f4b-9c5c-c3dc02494c46" xmlns:ns4="2f73596d-a490-4938-9ae7-6f2abd4edc7d" targetNamespace="http://schemas.microsoft.com/office/2006/metadata/properties" ma:root="true" ma:fieldsID="8dbb4452feda95d41a68f55f9310cbf0" ns1:_="" ns2:_="" ns4:_="">
     <xsd:import namespace="http://schemas.microsoft.com/sharepoint/v3"/>
@@ -50958,24 +50715,287 @@
 </ct:contentTypeSchema>
 </file>
 
+<file path=customXml/item3.xml><?xml version="1.0" encoding="utf-8"?>
+<p:properties xmlns:p="http://schemas.microsoft.com/office/2006/metadata/properties" xmlns:xsi="http://www.w3.org/2001/XMLSchema-instance" xmlns:pc="http://schemas.microsoft.com/office/infopath/2007/PartnerControls">
+  <documentManagement>
+    <_dlc_DocIdPersistId xmlns="2f73596d-a490-4938-9ae7-6f2abd4edc7d" xsi:nil="true"/>
+    <_dlc_DocIdUrl xmlns="2f73596d-a490-4938-9ae7-6f2abd4edc7d">
+      <Url>https://epam.sharepoint.com/sites/policy/_layouts/15/DocIdRedir.aspx?ID=EPAM-1788376749-106</Url>
+      <Description>EPAM-1788376749-106</Description>
+    </_dlc_DocIdUrl>
+    <_dlc_DocId xmlns="2f73596d-a490-4938-9ae7-6f2abd4edc7d">EPAM-1788376749-106</_dlc_DocId>
+    <Company xmlns="http://schemas.microsoft.com/sharepoint/v3" xsi:nil="true"/>
+    <DocumentArea xmlns="a17c10a8-bd22-4f4b-9c5c-c3dc02494c46">
+      <Value>Maintenance and Support</Value>
+    </DocumentArea>
+    <Subarea xmlns="a17c10a8-bd22-4f4b-9c5c-c3dc02494c46">###</Subarea>
+    <Document_x0020_Approver_x0020__x0028_position_x0029_ xmlns="a17c10a8-bd22-4f4b-9c5c-c3dc02494c46">Senior Director, Delivery Management Office</Document_x0020_Approver_x0020__x0028_position_x0029_>
+    <Document_x0020_Owner_x0020__x0028_position_x0029_ xmlns="a17c10a8-bd22-4f4b-9c5c-c3dc02494c46">Head of Global Delivery</Document_x0020_Owner_x0020__x0028_position_x0029_>
+    <EPAMDocumentID_x0020_ xmlns="a17c10a8-bd22-4f4b-9c5c-c3dc02494c46">EPAM_Template-1203</EPAMDocumentID_x0020_>
+    <TemplatesTextContent xmlns="a17c10a8-bd22-4f4b-9c5c-c3dc02494c46">IT SERVICES MONTHLY REVIEW 
+Reported period : &lt;month, year &gt;
+CONFIDENTIAL  |  
+© 
+2024
+ EPAM Systems, Inc.
+IT SERVICE HEALTH : SERVICE VOLUME
+&lt;Diagram with all user’s and monitoring  incidents during reported period ; including count of incidents and resolver assignment group&gt;
+IT SERVICE HEALTH : SERVICE VOLUME
+&lt;Diagram with all service requests during reported period, should include numbers of all INC and SRs tickets during this period.​
+Business meaning:​
+These numbers represent unique tasks that came to each team and required attention and effort.​
+Proposed actions / decisions:​
+Analyzing volume trends correlating with major events;​
+Volume spikes after major events may indicate the need for further research of systemic root causes. &gt;
+3
+Tower (top10)
+Created INC/SR during &lt;repot period&gt;
+Created INC/SR during &lt;repot period&gt;
+Trend
+&lt;Assignment group&gt;
+&lt;number or INC/SR&gt;
+&lt;number or INC/SR&gt;
+&lt;increase / decrease &gt;
+&lt;Assignment group&gt;
+&lt;number or INC/SR&gt;
+&lt;number or INC/SR&gt;
+IT SERVICE HEALTH: &lt;Project&gt; SERVICE VOLUME
+&lt;Diagram with all user’s and monitoring  incidents during reported period for a specific project (not including services covered  by client); including count of incidents and resolver assignment group
+4
+Business meaning:​
+These numbers represent unique tasks that came to each team and required attention and effort.​
+Proposed actions / decisions:​
+Analyzing volume trends correlating with major events;​
+Volume spikes after major events may indicate the need for further research of systemic root causes. &gt;
+IT SERVICE HEALTH: &lt;Project&gt; SERVICE VOLUME
+&lt;Diagram with ALL service requests (opened, resolved, closed) related  to a specific project &gt;
+Business meaning:​
+These numbers represent unique tasks that came to each team and required attention and effort.​
+Proposed actions / decisions:​
+Analyzing volume trends correlating with major events;​
+The number of increased/decreased tickers should be specified, and possible action items proposed.
+5
+6
+IT SERVICE HEALTH: &lt;Project/Team&gt; Incidents’ SLAs
+&lt;Examples&gt;
+Business meaning:​
+This stats will show whether Response and Resolution SLA are within SLA
+.​
+Proposed actions / decisions:​
+Analyzing SLA breaching
+Keep SLAs calibration and monitoring 
+SLA targets:
+&lt;Specify SLA targets for different priority levels &gt;
+&lt;Diagram with Average time for processing different types of priority levels incidents, should contain Average time for processing P1-P4 Incidents &gt;
+7
+IT SERVICE HEALTH: &lt;Project/team&gt; Incidents’ SLAs
+Business meaning:​
+This stats will show whether Response and Resolution SLA are within SLA for different priority levels
+Proposed actions / decisions:​
+Analyzing SLA breaching 
+Keep SLAs calibration and monitoring
+SLA targets:
+P1 &lt;should be specified for each one&gt;
+P2
+P3
+P4
+IT SERVICE HEALTH: &lt;Team/Project&gt; INCs’ and SRs’ SLA 
+8
+&lt;insert the following diagrams/ statistics charts:
+Average processing time for Service Requests, Resolution time for Service requests, Ticket resolution quality 
+Reassignment Compliance&gt;
+Business meaning:​
+This stats will show whether Average processing time of Service Requests is healthy; Reassignment Compliance and Ticket resolution quality (number of reopen)
+Proposed actions / decisions:​
+Analyzing service volume and propose action items if required
+IT SERVICE HEALTH: P0/P1 INCIDENTS
+&lt;Diagram with closed P0/P1 incidents grouped by resolver group&gt;
+P0/P1ticket
+SLA Breached
+Team
+Short Description
+RCA
+Prevention/Mitigation
+9
+Business meaning:​
+These numbers show how many tickets of different Priority are resolved by each group and may provide better understanding of the complexity of incidents,
+Actions / decisions:​
+Analyzing &lt;Analyzing trends may drive DEV effort prioritization of “code improvements” vs “feature development&gt;  &lt;stability of Code , structure , code&gt;
+IT SERVICE HEALTH: TICKET AGE
+&lt;Diagram with all open incidents grouped by Backlog time and diagram with all open incidents grouped by Backlog time and priority: grouped by the following statuses : New, In Progress, On Hold &gt;
+Tower (top 10)
+Age (1+ month)
+10
+Business meaning:​
+Displays the number of days tickets have been open in the system. &lt;open tasks, backlog&gt;
+Actions / decisions:​
+&lt;for future Problem Management &gt;
+IT SERVICE Customer Satisfaction (CSAT)
+&lt;Diagram with statistics and trend line&gt;
+11
+Business meaning:​
+Customer satisfaction and score that indicates how satisfied a customer is with a specific product, transaction, or interaction with a company
+Actions / decisions:​
+Regular monthly CSAT Review 
+SERVICE TOWER: SERVICE DESK
+&lt;only if required &gt;
+Service Volume
+&lt;D
+iagram with total number of Tickets created in ITSM tool vs Tickets accepted by L1 vs First Level resolution (FLR) tickets
+Service SLAs
+&lt;
+Service Desk first call resolution rate of  level 1Support (True/ falls)
+Response SLA for L1 team (True/ falls)
+Tickets Age
+&lt;diagram  with all Open INC+ SR grouped by Backlog time and State (Pending, Open, Work in progress) for L1 Team&gt;
+12
+Key Highlights 
+&lt;specify for reported period &gt;
+Critical issues 
+&lt;specify for reported period &gt;
+SLA target
+&lt;specify for reported period &gt;
+SERVICE TOWER: CHANGE MANAGEMENT 
+&lt;Diagram with all changes groups by statuses which are in ITSM tool&gt;
+13
+Business meaning 
+The number of RFCs
+Actions / decisions:​
+SERVICE TOWER :PROBLEM MANAGEMENT
+&lt;Diagram with all problems groups by statuses which are in ITSM tool&gt;
+14
+Business meaning 
+These numbers may provide better understanding of the complexity of incidents, stability of Code, and overall health of environment 
+Actions / decisions:​
+RISKS
+&lt;Mention all possible risks grouped by a separate tower of service (Service Desk, Change / INC/Problem Management , Different teams within the project )&gt;
+15
+Risks
+Risk Owner
+Impact 
+Description/Impact
+Mitigation
+IT SERVICE IMPROVEMENTS (CSIP)
+Short Description 
+Owner
+Impact
+Date
+16
+Completed This Month
+Planned Next Month 
+Short Description 
+Owner
+Impact
+Date
+THANK YOU!
+17
+</TemplatesTextContent>
+    <SubjectDoc xmlns="a17c10a8-bd22-4f4b-9c5c-c3dc02494c46">Template</SubjectDoc>
+    <FriendlyURL xmlns="a17c10a8-bd22-4f4b-9c5c-c3dc02494c46">files/templates-examples/global-delivery/monthly-review-report.pptx</FriendlyURL>
+    <BriefDescription xmlns="a17c10a8-bd22-4f4b-9c5c-c3dc02494c46">This template is related to Maintenance and Support Guideline and intended to be used for monthly status reporting of maintenance and support project.</BriefDescription>
+    <WorkStorage xmlns="a17c10a8-bd22-4f4b-9c5c-c3dc02494c46">
+      <Url>https://epam.sharepoint.com/sites/policy/work/Shared%20Documents/Work%20Product%20Templates/Continuous%20delivery/Maintenance%20and%20Support</Url>
+      <Description>/sites/policy/work/Shared Documents/Work Product Templates/Continuous delivery/Maintenance and Support</Description>
+    </WorkStorage>
+    <PageName xmlns="a17c10a8-bd22-4f4b-9c5c-c3dc02494c46">
+      <Url>https://policy.epam.com/pages/templates-examples/monthly-review-report</Url>
+      <Description>Template: Monthly Review Report</Description>
+    </PageName>
+    <OrganizationalUnit xmlns="a17c10a8-bd22-4f4b-9c5c-c3dc02494c46">
+      <Url>https://people.epam.com/network/1/8aec5375-fd5e-4dd5-aa02-b9d225a43413/structure</Url>
+      <Description>Delivery Management Office</Description>
+    </OrganizationalUnit>
+    <LocationCountry xmlns="a17c10a8-bd22-4f4b-9c5c-c3dc02494c46">
+      <Value>Global</Value>
+    </LocationCountry>
+    <LastApprovalDate xmlns="a17c10a8-bd22-4f4b-9c5c-c3dc02494c46">2022-12-20T21:00:00+00:00</LastApprovalDate>
+    <LastApproverName xmlns="a17c10a8-bd22-4f4b-9c5c-c3dc02494c46">Dmitry Makeev</LastApproverName>
+    <Standards xmlns="a17c10a8-bd22-4f4b-9c5c-c3dc02494c46">
+      <Value>###</Value>
+    </Standards>
+  </documentManagement>
+</p:properties>
+</file>
+
 <file path=customXml/item4.xml><?xml version="1.0" encoding="utf-8"?>
 <?mso-contentType ?>
-<FormTemplates xmlns="http://schemas.microsoft.com/sharepoint/v3/contenttype/forms">
-  <Display>DocumentLibraryForm</Display>
-  <Edit>DocumentLibraryForm</Edit>
-  <New>DocumentLibraryForm</New>
-</FormTemplates>
+<spe:Receivers xmlns:spe="http://schemas.microsoft.com/sharepoint/events">
+  <Receiver>
+    <Name>Document ID Generator</Name>
+    <Synchronization>Synchronous</Synchronization>
+    <Type>10001</Type>
+    <SequenceNumber>1000</SequenceNumber>
+    <Url/>
+    <Assembly>Microsoft.Office.DocumentManagement, Version=16.0.0.0, Culture=neutral, PublicKeyToken=71e9bce111e9429c</Assembly>
+    <Class>Microsoft.Office.DocumentManagement.Internal.DocIdHandler</Class>
+    <Data/>
+    <Filter/>
+  </Receiver>
+  <Receiver>
+    <Name>Document ID Generator</Name>
+    <Synchronization>Synchronous</Synchronization>
+    <Type>10002</Type>
+    <SequenceNumber>1001</SequenceNumber>
+    <Url/>
+    <Assembly>Microsoft.Office.DocumentManagement, Version=16.0.0.0, Culture=neutral, PublicKeyToken=71e9bce111e9429c</Assembly>
+    <Class>Microsoft.Office.DocumentManagement.Internal.DocIdHandler</Class>
+    <Data/>
+    <Filter/>
+  </Receiver>
+  <Receiver>
+    <Name>Document ID Generator</Name>
+    <Synchronization>Synchronous</Synchronization>
+    <Type>10004</Type>
+    <SequenceNumber>1002</SequenceNumber>
+    <Url/>
+    <Assembly>Microsoft.Office.DocumentManagement, Version=16.0.0.0, Culture=neutral, PublicKeyToken=71e9bce111e9429c</Assembly>
+    <Class>Microsoft.Office.DocumentManagement.Internal.DocIdHandler</Class>
+    <Data/>
+    <Filter/>
+  </Receiver>
+  <Receiver>
+    <Name>Document ID Generator</Name>
+    <Synchronization>Synchronous</Synchronization>
+    <Type>10006</Type>
+    <SequenceNumber>1003</SequenceNumber>
+    <Url/>
+    <Assembly>Microsoft.Office.DocumentManagement, Version=16.0.0.0, Culture=neutral, PublicKeyToken=71e9bce111e9429c</Assembly>
+    <Class>Microsoft.Office.DocumentManagement.Internal.DocIdHandler</Class>
+    <Data/>
+    <Filter/>
+  </Receiver>
+</spe:Receivers>
 </file>
 
 <file path=customXml/itemProps1.xml><?xml version="1.0" encoding="utf-8"?>
-<ds:datastoreItem xmlns:ds="http://schemas.openxmlformats.org/officeDocument/2006/customXml" ds:itemID="{4A6F74FC-DCE4-4FAD-B152-022B257C5C9F}">
+<ds:datastoreItem xmlns:ds="http://schemas.openxmlformats.org/officeDocument/2006/customXml" ds:itemID="{7C112C0A-7F3A-4E28-80B1-4B14EB4F54BD}">
   <ds:schemaRefs>
-    <ds:schemaRef ds:uri="http://schemas.microsoft.com/sharepoint/events"/>
+    <ds:schemaRef ds:uri="http://schemas.microsoft.com/sharepoint/v3/contenttype/forms"/>
   </ds:schemaRefs>
 </ds:datastoreItem>
 </file>
 
 <file path=customXml/itemProps2.xml><?xml version="1.0" encoding="utf-8"?>
+<ds:datastoreItem xmlns:ds="http://schemas.openxmlformats.org/officeDocument/2006/customXml" ds:itemID="{1A413D99-DCF0-4BFE-8F14-77623FB180E9}">
+  <ds:schemaRefs>
+    <ds:schemaRef ds:uri="http://schemas.microsoft.com/office/2006/metadata/contentType"/>
+    <ds:schemaRef ds:uri="http://schemas.microsoft.com/office/2006/metadata/properties/metaAttributes"/>
+    <ds:schemaRef ds:uri="http://www.w3.org/2001/XMLSchema"/>
+    <ds:schemaRef ds:uri="http://schemas.microsoft.com/office/2006/metadata/properties"/>
+    <ds:schemaRef ds:uri="http://schemas.microsoft.com/sharepoint/v3"/>
+    <ds:schemaRef ds:uri="a17c10a8-bd22-4f4b-9c5c-c3dc02494c46"/>
+    <ds:schemaRef ds:uri="2f73596d-a490-4938-9ae7-6f2abd4edc7d"/>
+    <ds:schemaRef ds:uri="http://schemas.microsoft.com/office/2006/documentManagement/types"/>
+    <ds:schemaRef ds:uri="http://schemas.microsoft.com/office/infopath/2007/PartnerControls"/>
+    <ds:schemaRef ds:uri="http://schemas.openxmlformats.org/package/2006/metadata/core-properties"/>
+    <ds:schemaRef ds:uri="http://purl.org/dc/elements/1.1/"/>
+    <ds:schemaRef ds:uri="http://purl.org/dc/terms/"/>
+    <ds:schemaRef ds:uri="http://schemas.microsoft.com/internal/obd"/>
+  </ds:schemaRefs>
+</ds:datastoreItem>
+</file>
+
+<file path=customXml/itemProps3.xml><?xml version="1.0" encoding="utf-8"?>
 <ds:datastoreItem xmlns:ds="http://schemas.openxmlformats.org/officeDocument/2006/customXml" ds:itemID="{A50FA2CC-35CC-4D88-B54E-498208D7C745}">
   <ds:schemaRefs>
     <ds:schemaRef ds:uri="http://purl.org/dc/elements/1.1/"/>
@@ -50997,30 +51017,10 @@
 </ds:datastoreItem>
 </file>
 
-<file path=customXml/itemProps3.xml><?xml version="1.0" encoding="utf-8"?>
-<ds:datastoreItem xmlns:ds="http://schemas.openxmlformats.org/officeDocument/2006/customXml" ds:itemID="{1A413D99-DCF0-4BFE-8F14-77623FB180E9}">
+<file path=customXml/itemProps4.xml><?xml version="1.0" encoding="utf-8"?>
+<ds:datastoreItem xmlns:ds="http://schemas.openxmlformats.org/officeDocument/2006/customXml" ds:itemID="{4A6F74FC-DCE4-4FAD-B152-022B257C5C9F}">
   <ds:schemaRefs>
-    <ds:schemaRef ds:uri="http://schemas.microsoft.com/office/2006/metadata/contentType"/>
-    <ds:schemaRef ds:uri="http://schemas.microsoft.com/office/2006/metadata/properties/metaAttributes"/>
-    <ds:schemaRef ds:uri="http://www.w3.org/2001/XMLSchema"/>
-    <ds:schemaRef ds:uri="http://schemas.microsoft.com/office/2006/metadata/properties"/>
-    <ds:schemaRef ds:uri="http://schemas.microsoft.com/sharepoint/v3"/>
-    <ds:schemaRef ds:uri="a17c10a8-bd22-4f4b-9c5c-c3dc02494c46"/>
-    <ds:schemaRef ds:uri="2f73596d-a490-4938-9ae7-6f2abd4edc7d"/>
-    <ds:schemaRef ds:uri="http://schemas.microsoft.com/office/2006/documentManagement/types"/>
-    <ds:schemaRef ds:uri="http://schemas.microsoft.com/office/infopath/2007/PartnerControls"/>
-    <ds:schemaRef ds:uri="http://schemas.openxmlformats.org/package/2006/metadata/core-properties"/>
-    <ds:schemaRef ds:uri="http://purl.org/dc/elements/1.1/"/>
-    <ds:schemaRef ds:uri="http://purl.org/dc/terms/"/>
-    <ds:schemaRef ds:uri="http://schemas.microsoft.com/internal/obd"/>
-  </ds:schemaRefs>
-</ds:datastoreItem>
-</file>
-
-<file path=customXml/itemProps4.xml><?xml version="1.0" encoding="utf-8"?>
-<ds:datastoreItem xmlns:ds="http://schemas.openxmlformats.org/officeDocument/2006/customXml" ds:itemID="{7C112C0A-7F3A-4E28-80B1-4B14EB4F54BD}">
-  <ds:schemaRefs>
-    <ds:schemaRef ds:uri="http://schemas.microsoft.com/sharepoint/v3/contenttype/forms"/>
+    <ds:schemaRef ds:uri="http://schemas.microsoft.com/sharepoint/events"/>
   </ds:schemaRefs>
 </ds:datastoreItem>
 </file>
--- a/Compile_safe_code_with_Visitor_pattern.pptx
+++ b/Compile_safe_code_with_Visitor_pattern.pptx
@@ -15,8 +15,8 @@
   </p:handoutMasterIdLst>
   <p:sldIdLst>
     <p:sldId id="256" r:id="rId9"/>
-    <p:sldId id="277" r:id="rId10"/>
-    <p:sldId id="257" r:id="rId11"/>
+    <p:sldId id="257" r:id="rId10"/>
+    <p:sldId id="281" r:id="rId11"/>
     <p:sldId id="278" r:id="rId12"/>
     <p:sldId id="280" r:id="rId13"/>
     <p:sldId id="279" r:id="rId14"/>
@@ -159,9 +159,283 @@
 <file path=ppt/revisionInfo.xml><?xml version="1.0" encoding="utf-8"?>
 <p1510:revInfo xmlns:a="http://schemas.openxmlformats.org/drawingml/2006/main" xmlns:r="http://schemas.openxmlformats.org/officeDocument/2006/relationships" xmlns:p1510="http://schemas.microsoft.com/office/powerpoint/2015/10/main">
   <p1510:revLst>
-    <p1510:client id="{F5315449-A8DC-420D-A04A-FD4AFF772397}" v="2" dt="2022-12-27T13:53:57.557"/>
+    <p1510:client id="{B2ED5D30-8CE1-0511-8528-431262B8F5B6}" v="2" dt="2025-05-01T05:59:32.254"/>
+    <p1510:client id="{E4F7CB7F-0426-0D37-2573-5BD4667ABA32}" v="70" dt="2025-05-01T06:05:31.681"/>
   </p1510:revLst>
 </p1510:revInfo>
+</file>
+
+<file path=ppt/changesInfos/changesInfo1.xml><?xml version="1.0" encoding="utf-8"?>
+<pc:chgInfo xmlns:a="http://schemas.openxmlformats.org/drawingml/2006/main" xmlns:r="http://schemas.openxmlformats.org/officeDocument/2006/relationships" xmlns:ac="http://schemas.microsoft.com/office/drawing/2013/main/command" xmlns:pc="http://schemas.microsoft.com/office/powerpoint/2013/main/command">
+  <pc:docChgLst>
+    <pc:chgData name="Dmitrii Bessonov" userId="S::dmitrii_bessonov@epam.com::4c240825-8d51-4f89-bec0-b7e7687d9d22" providerId="AD" clId="Web-{B2ED5D30-8CE1-0511-8528-431262B8F5B6}"/>
+    <pc:docChg chg="addSld delSld">
+      <pc:chgData name="Dmitrii Bessonov" userId="S::dmitrii_bessonov@epam.com::4c240825-8d51-4f89-bec0-b7e7687d9d22" providerId="AD" clId="Web-{B2ED5D30-8CE1-0511-8528-431262B8F5B6}" dt="2025-05-01T05:59:32.254" v="1"/>
+      <pc:docMkLst>
+        <pc:docMk/>
+      </pc:docMkLst>
+      <pc:sldChg chg="add del replId">
+        <pc:chgData name="Dmitrii Bessonov" userId="S::dmitrii_bessonov@epam.com::4c240825-8d51-4f89-bec0-b7e7687d9d22" providerId="AD" clId="Web-{B2ED5D30-8CE1-0511-8528-431262B8F5B6}" dt="2025-05-01T05:59:32.254" v="1"/>
+        <pc:sldMkLst>
+          <pc:docMk/>
+          <pc:sldMk cId="870127291" sldId="281"/>
+        </pc:sldMkLst>
+      </pc:sldChg>
+    </pc:docChg>
+  </pc:docChgLst>
+  <pc:docChgLst>
+    <pc:chgData name="Dmitrii Bessonov" userId="S::dmitrii_bessonov@epam.com::4c240825-8d51-4f89-bec0-b7e7687d9d22" providerId="AD" clId="Web-{E4F7CB7F-0426-0D37-2573-5BD4667ABA32}"/>
+    <pc:docChg chg="mod addSld delSld modSld">
+      <pc:chgData name="Dmitrii Bessonov" userId="S::dmitrii_bessonov@epam.com::4c240825-8d51-4f89-bec0-b7e7687d9d22" providerId="AD" clId="Web-{E4F7CB7F-0426-0D37-2573-5BD4667ABA32}" dt="2025-05-01T06:21:58.222" v="74" actId="20577"/>
+      <pc:docMkLst>
+        <pc:docMk/>
+      </pc:docMkLst>
+      <pc:sldChg chg="addSp delSp modSp mod modClrScheme chgLayout">
+        <pc:chgData name="Dmitrii Bessonov" userId="S::dmitrii_bessonov@epam.com::4c240825-8d51-4f89-bec0-b7e7687d9d22" providerId="AD" clId="Web-{E4F7CB7F-0426-0D37-2573-5BD4667ABA32}" dt="2025-05-01T06:05:19.962" v="63"/>
+        <pc:sldMkLst>
+          <pc:docMk/>
+          <pc:sldMk cId="3711491439" sldId="257"/>
+        </pc:sldMkLst>
+        <pc:spChg chg="del">
+          <ac:chgData name="Dmitrii Bessonov" userId="S::dmitrii_bessonov@epam.com::4c240825-8d51-4f89-bec0-b7e7687d9d22" providerId="AD" clId="Web-{E4F7CB7F-0426-0D37-2573-5BD4667ABA32}" dt="2025-05-01T06:03:03.019" v="22"/>
+          <ac:spMkLst>
+            <pc:docMk/>
+            <pc:sldMk cId="3711491439" sldId="257"/>
+            <ac:spMk id="2" creationId="{00000000-0000-0000-0000-000000000000}"/>
+          </ac:spMkLst>
+        </pc:spChg>
+        <pc:spChg chg="del">
+          <ac:chgData name="Dmitrii Bessonov" userId="S::dmitrii_bessonov@epam.com::4c240825-8d51-4f89-bec0-b7e7687d9d22" providerId="AD" clId="Web-{E4F7CB7F-0426-0D37-2573-5BD4667ABA32}" dt="2025-05-01T06:02:42.081" v="14"/>
+          <ac:spMkLst>
+            <pc:docMk/>
+            <pc:sldMk cId="3711491439" sldId="257"/>
+            <ac:spMk id="3" creationId="{00000000-0000-0000-0000-000000000000}"/>
+          </ac:spMkLst>
+        </pc:spChg>
+        <pc:spChg chg="add del mod ord">
+          <ac:chgData name="Dmitrii Bessonov" userId="S::dmitrii_bessonov@epam.com::4c240825-8d51-4f89-bec0-b7e7687d9d22" providerId="AD" clId="Web-{E4F7CB7F-0426-0D37-2573-5BD4667ABA32}" dt="2025-05-01T06:04:01.053" v="36"/>
+          <ac:spMkLst>
+            <pc:docMk/>
+            <pc:sldMk cId="3711491439" sldId="257"/>
+            <ac:spMk id="8" creationId="{5EC384CA-60F0-B22C-959B-F897379F7B1A}"/>
+          </ac:spMkLst>
+        </pc:spChg>
+        <pc:spChg chg="del mod">
+          <ac:chgData name="Dmitrii Bessonov" userId="S::dmitrii_bessonov@epam.com::4c240825-8d51-4f89-bec0-b7e7687d9d22" providerId="AD" clId="Web-{E4F7CB7F-0426-0D37-2573-5BD4667ABA32}" dt="2025-05-01T06:02:52.628" v="19"/>
+          <ac:spMkLst>
+            <pc:docMk/>
+            <pc:sldMk cId="3711491439" sldId="257"/>
+            <ac:spMk id="10" creationId="{7DF63890-7A27-62FC-0F61-14AE1AD9DC34}"/>
+          </ac:spMkLst>
+        </pc:spChg>
+        <pc:spChg chg="add del mod ord">
+          <ac:chgData name="Dmitrii Bessonov" userId="S::dmitrii_bessonov@epam.com::4c240825-8d51-4f89-bec0-b7e7687d9d22" providerId="AD" clId="Web-{E4F7CB7F-0426-0D37-2573-5BD4667ABA32}" dt="2025-05-01T06:04:55.586" v="58"/>
+          <ac:spMkLst>
+            <pc:docMk/>
+            <pc:sldMk cId="3711491439" sldId="257"/>
+            <ac:spMk id="11" creationId="{DDB5A5BD-E00E-41F8-3754-BE69224599E1}"/>
+          </ac:spMkLst>
+        </pc:spChg>
+        <pc:spChg chg="mod ord">
+          <ac:chgData name="Dmitrii Bessonov" userId="S::dmitrii_bessonov@epam.com::4c240825-8d51-4f89-bec0-b7e7687d9d22" providerId="AD" clId="Web-{E4F7CB7F-0426-0D37-2573-5BD4667ABA32}" dt="2025-05-01T06:03:29.223" v="28"/>
+          <ac:spMkLst>
+            <pc:docMk/>
+            <pc:sldMk cId="3711491439" sldId="257"/>
+            <ac:spMk id="12" creationId="{AA914C02-A0D5-DD26-BF6D-53E7F6D519ED}"/>
+          </ac:spMkLst>
+        </pc:spChg>
+        <pc:spChg chg="add del mod">
+          <ac:chgData name="Dmitrii Bessonov" userId="S::dmitrii_bessonov@epam.com::4c240825-8d51-4f89-bec0-b7e7687d9d22" providerId="AD" clId="Web-{E4F7CB7F-0426-0D37-2573-5BD4667ABA32}" dt="2025-05-01T06:05:09.805" v="61"/>
+          <ac:spMkLst>
+            <pc:docMk/>
+            <pc:sldMk cId="3711491439" sldId="257"/>
+            <ac:spMk id="16" creationId="{B699BAE2-0796-2120-C276-C011C851D738}"/>
+          </ac:spMkLst>
+        </pc:spChg>
+        <pc:spChg chg="add del mod ord">
+          <ac:chgData name="Dmitrii Bessonov" userId="S::dmitrii_bessonov@epam.com::4c240825-8d51-4f89-bec0-b7e7687d9d22" providerId="AD" clId="Web-{E4F7CB7F-0426-0D37-2573-5BD4667ABA32}" dt="2025-05-01T06:04:08.647" v="39"/>
+          <ac:spMkLst>
+            <pc:docMk/>
+            <pc:sldMk cId="3711491439" sldId="257"/>
+            <ac:spMk id="18" creationId="{4B9DD5DB-C9E8-CA67-CC0F-6DDBE84C1A24}"/>
+          </ac:spMkLst>
+        </pc:spChg>
+        <pc:spChg chg="add del">
+          <ac:chgData name="Dmitrii Bessonov" userId="S::dmitrii_bessonov@epam.com::4c240825-8d51-4f89-bec0-b7e7687d9d22" providerId="AD" clId="Web-{E4F7CB7F-0426-0D37-2573-5BD4667ABA32}" dt="2025-05-01T06:03:00.113" v="21"/>
+          <ac:spMkLst>
+            <pc:docMk/>
+            <pc:sldMk cId="3711491439" sldId="257"/>
+            <ac:spMk id="20" creationId="{4B6DA12D-A2FF-8E72-F7EE-46D695A76090}"/>
+          </ac:spMkLst>
+        </pc:spChg>
+        <pc:spChg chg="add del mod">
+          <ac:chgData name="Dmitrii Bessonov" userId="S::dmitrii_bessonov@epam.com::4c240825-8d51-4f89-bec0-b7e7687d9d22" providerId="AD" clId="Web-{E4F7CB7F-0426-0D37-2573-5BD4667ABA32}" dt="2025-05-01T06:03:29.223" v="28"/>
+          <ac:spMkLst>
+            <pc:docMk/>
+            <pc:sldMk cId="3711491439" sldId="257"/>
+            <ac:spMk id="22" creationId="{BE6D35B4-563B-D65A-EDB4-A82389C8F06A}"/>
+          </ac:spMkLst>
+        </pc:spChg>
+        <pc:spChg chg="add">
+          <ac:chgData name="Dmitrii Bessonov" userId="S::dmitrii_bessonov@epam.com::4c240825-8d51-4f89-bec0-b7e7687d9d22" providerId="AD" clId="Web-{E4F7CB7F-0426-0D37-2573-5BD4667ABA32}" dt="2025-05-01T06:03:03.410" v="23"/>
+          <ac:spMkLst>
+            <pc:docMk/>
+            <pc:sldMk cId="3711491439" sldId="257"/>
+            <ac:spMk id="24" creationId="{DE1B32CC-E5FB-9A8D-08AD-80B29CD91C78}"/>
+          </ac:spMkLst>
+        </pc:spChg>
+        <pc:spChg chg="add del mod ord">
+          <ac:chgData name="Dmitrii Bessonov" userId="S::dmitrii_bessonov@epam.com::4c240825-8d51-4f89-bec0-b7e7687d9d22" providerId="AD" clId="Web-{E4F7CB7F-0426-0D37-2573-5BD4667ABA32}" dt="2025-05-01T06:04:06.334" v="38"/>
+          <ac:spMkLst>
+            <pc:docMk/>
+            <pc:sldMk cId="3711491439" sldId="257"/>
+            <ac:spMk id="25" creationId="{6E4DBE09-0380-2121-D022-354CED0E4253}"/>
+          </ac:spMkLst>
+        </pc:spChg>
+        <pc:spChg chg="add del mod">
+          <ac:chgData name="Dmitrii Bessonov" userId="S::dmitrii_bessonov@epam.com::4c240825-8d51-4f89-bec0-b7e7687d9d22" providerId="AD" clId="Web-{E4F7CB7F-0426-0D37-2573-5BD4667ABA32}" dt="2025-05-01T06:03:50.318" v="33"/>
+          <ac:spMkLst>
+            <pc:docMk/>
+            <pc:sldMk cId="3711491439" sldId="257"/>
+            <ac:spMk id="26" creationId="{24D44845-945A-FEF5-991A-A344A7B7E5AE}"/>
+          </ac:spMkLst>
+        </pc:spChg>
+        <pc:spChg chg="add del">
+          <ac:chgData name="Dmitrii Bessonov" userId="S::dmitrii_bessonov@epam.com::4c240825-8d51-4f89-bec0-b7e7687d9d22" providerId="AD" clId="Web-{E4F7CB7F-0426-0D37-2573-5BD4667ABA32}" dt="2025-05-01T06:04:53.242" v="57"/>
+          <ac:spMkLst>
+            <pc:docMk/>
+            <pc:sldMk cId="3711491439" sldId="257"/>
+            <ac:spMk id="32" creationId="{63D7B070-7974-E68F-A2D0-4B47B68C1224}"/>
+          </ac:spMkLst>
+        </pc:spChg>
+        <pc:spChg chg="add del mod">
+          <ac:chgData name="Dmitrii Bessonov" userId="S::dmitrii_bessonov@epam.com::4c240825-8d51-4f89-bec0-b7e7687d9d22" providerId="AD" clId="Web-{E4F7CB7F-0426-0D37-2573-5BD4667ABA32}" dt="2025-05-01T06:05:01.430" v="60"/>
+          <ac:spMkLst>
+            <pc:docMk/>
+            <pc:sldMk cId="3711491439" sldId="257"/>
+            <ac:spMk id="34" creationId="{954123A6-F75E-2A53-322E-8967467EDBB5}"/>
+          </ac:spMkLst>
+        </pc:spChg>
+        <pc:spChg chg="add">
+          <ac:chgData name="Dmitrii Bessonov" userId="S::dmitrii_bessonov@epam.com::4c240825-8d51-4f89-bec0-b7e7687d9d22" providerId="AD" clId="Web-{E4F7CB7F-0426-0D37-2573-5BD4667ABA32}" dt="2025-05-01T06:04:57.524" v="59"/>
+          <ac:spMkLst>
+            <pc:docMk/>
+            <pc:sldMk cId="3711491439" sldId="257"/>
+            <ac:spMk id="36" creationId="{C50D2F5E-5450-0B81-6C52-8617807A7790}"/>
+          </ac:spMkLst>
+        </pc:spChg>
+        <pc:spChg chg="add">
+          <ac:chgData name="Dmitrii Bessonov" userId="S::dmitrii_bessonov@epam.com::4c240825-8d51-4f89-bec0-b7e7687d9d22" providerId="AD" clId="Web-{E4F7CB7F-0426-0D37-2573-5BD4667ABA32}" dt="2025-05-01T06:05:10.243" v="62"/>
+          <ac:spMkLst>
+            <pc:docMk/>
+            <pc:sldMk cId="3711491439" sldId="257"/>
+            <ac:spMk id="38" creationId="{50BB4227-7C8C-A15F-68B2-639B460DB7F1}"/>
+          </ac:spMkLst>
+        </pc:spChg>
+        <pc:spChg chg="add mod">
+          <ac:chgData name="Dmitrii Bessonov" userId="S::dmitrii_bessonov@epam.com::4c240825-8d51-4f89-bec0-b7e7687d9d22" providerId="AD" clId="Web-{E4F7CB7F-0426-0D37-2573-5BD4667ABA32}" dt="2025-05-01T06:05:19.962" v="63"/>
+          <ac:spMkLst>
+            <pc:docMk/>
+            <pc:sldMk cId="3711491439" sldId="257"/>
+            <ac:spMk id="40" creationId="{79E49B00-AC74-D598-8910-CE5F11563EA3}"/>
+          </ac:spMkLst>
+        </pc:spChg>
+        <pc:picChg chg="add del">
+          <ac:chgData name="Dmitrii Bessonov" userId="S::dmitrii_bessonov@epam.com::4c240825-8d51-4f89-bec0-b7e7687d9d22" providerId="AD" clId="Web-{E4F7CB7F-0426-0D37-2573-5BD4667ABA32}" dt="2025-05-01T06:03:47.068" v="29"/>
+          <ac:picMkLst>
+            <pc:docMk/>
+            <pc:sldMk cId="3711491439" sldId="257"/>
+            <ac:picMk id="5" creationId="{9E6263BC-5469-AF5D-55AF-5C9D27E925AC}"/>
+          </ac:picMkLst>
+        </pc:picChg>
+        <pc:picChg chg="del">
+          <ac:chgData name="Dmitrii Bessonov" userId="S::dmitrii_bessonov@epam.com::4c240825-8d51-4f89-bec0-b7e7687d9d22" providerId="AD" clId="Web-{E4F7CB7F-0426-0D37-2573-5BD4667ABA32}" dt="2025-05-01T06:02:36.206" v="13"/>
+          <ac:picMkLst>
+            <pc:docMk/>
+            <pc:sldMk cId="3711491439" sldId="257"/>
+            <ac:picMk id="7" creationId="{9786D606-5187-FF80-DBDE-35D91C317CE8}"/>
+          </ac:picMkLst>
+        </pc:picChg>
+        <pc:picChg chg="add del">
+          <ac:chgData name="Dmitrii Bessonov" userId="S::dmitrii_bessonov@epam.com::4c240825-8d51-4f89-bec0-b7e7687d9d22" providerId="AD" clId="Web-{E4F7CB7F-0426-0D37-2573-5BD4667ABA32}" dt="2025-05-01T06:03:21.848" v="27"/>
+          <ac:picMkLst>
+            <pc:docMk/>
+            <pc:sldMk cId="3711491439" sldId="257"/>
+            <ac:picMk id="14" creationId="{9F4778CD-63E5-0E2C-A8DA-6723FA9F3CB2}"/>
+          </ac:picMkLst>
+        </pc:picChg>
+        <pc:picChg chg="add del">
+          <ac:chgData name="Dmitrii Bessonov" userId="S::dmitrii_bessonov@epam.com::4c240825-8d51-4f89-bec0-b7e7687d9d22" providerId="AD" clId="Web-{E4F7CB7F-0426-0D37-2573-5BD4667ABA32}" dt="2025-05-01T06:03:58.521" v="35"/>
+          <ac:picMkLst>
+            <pc:docMk/>
+            <pc:sldMk cId="3711491439" sldId="257"/>
+            <ac:picMk id="28" creationId="{AECB7983-E8EC-CAE6-A2BD-03DD8473F73E}"/>
+          </ac:picMkLst>
+        </pc:picChg>
+        <pc:picChg chg="add mod">
+          <ac:chgData name="Dmitrii Bessonov" userId="S::dmitrii_bessonov@epam.com::4c240825-8d51-4f89-bec0-b7e7687d9d22" providerId="AD" clId="Web-{E4F7CB7F-0426-0D37-2573-5BD4667ABA32}" dt="2025-05-01T06:04:01.615" v="37"/>
+          <ac:picMkLst>
+            <pc:docMk/>
+            <pc:sldMk cId="3711491439" sldId="257"/>
+            <ac:picMk id="30" creationId="{EC38ADEB-94D0-3208-9F36-9B175A08E953}"/>
+          </ac:picMkLst>
+        </pc:picChg>
+      </pc:sldChg>
+      <pc:sldChg chg="modSp">
+        <pc:chgData name="Dmitrii Bessonov" userId="S::dmitrii_bessonov@epam.com::4c240825-8d51-4f89-bec0-b7e7687d9d22" providerId="AD" clId="Web-{E4F7CB7F-0426-0D37-2573-5BD4667ABA32}" dt="2025-05-01T06:21:58.222" v="74" actId="20577"/>
+        <pc:sldMkLst>
+          <pc:docMk/>
+          <pc:sldMk cId="1009701064" sldId="273"/>
+        </pc:sldMkLst>
+        <pc:graphicFrameChg chg="modGraphic">
+          <ac:chgData name="Dmitrii Bessonov" userId="S::dmitrii_bessonov@epam.com::4c240825-8d51-4f89-bec0-b7e7687d9d22" providerId="AD" clId="Web-{E4F7CB7F-0426-0D37-2573-5BD4667ABA32}" dt="2025-05-01T06:21:58.222" v="74" actId="20577"/>
+          <ac:graphicFrameMkLst>
+            <pc:docMk/>
+            <pc:sldMk cId="1009701064" sldId="273"/>
+            <ac:graphicFrameMk id="18" creationId="{4933E037-AA1C-6BDD-3C8C-7986833378D6}"/>
+          </ac:graphicFrameMkLst>
+        </pc:graphicFrameChg>
+      </pc:sldChg>
+      <pc:sldChg chg="addSp delSp modSp del">
+        <pc:chgData name="Dmitrii Bessonov" userId="S::dmitrii_bessonov@epam.com::4c240825-8d51-4f89-bec0-b7e7687d9d22" providerId="AD" clId="Web-{E4F7CB7F-0426-0D37-2573-5BD4667ABA32}" dt="2025-05-01T06:05:31.681" v="64"/>
+        <pc:sldMkLst>
+          <pc:docMk/>
+          <pc:sldMk cId="3015562108" sldId="277"/>
+        </pc:sldMkLst>
+        <pc:spChg chg="add del mod">
+          <ac:chgData name="Dmitrii Bessonov" userId="S::dmitrii_bessonov@epam.com::4c240825-8d51-4f89-bec0-b7e7687d9d22" providerId="AD" clId="Web-{E4F7CB7F-0426-0D37-2573-5BD4667ABA32}" dt="2025-05-01T06:01:20.656" v="3"/>
+          <ac:spMkLst>
+            <pc:docMk/>
+            <pc:sldMk cId="3015562108" sldId="277"/>
+            <ac:spMk id="4" creationId="{1AF91DC4-F8E8-9E1D-2A76-806AC9B0D144}"/>
+          </ac:spMkLst>
+        </pc:spChg>
+        <pc:picChg chg="add del mod">
+          <ac:chgData name="Dmitrii Bessonov" userId="S::dmitrii_bessonov@epam.com::4c240825-8d51-4f89-bec0-b7e7687d9d22" providerId="AD" clId="Web-{E4F7CB7F-0426-0D37-2573-5BD4667ABA32}" dt="2025-05-01T06:02:04.220" v="10"/>
+          <ac:picMkLst>
+            <pc:docMk/>
+            <pc:sldMk cId="3015562108" sldId="277"/>
+            <ac:picMk id="6" creationId="{586363ED-9AE2-7082-F377-BAEB607EB840}"/>
+          </ac:picMkLst>
+        </pc:picChg>
+      </pc:sldChg>
+      <pc:sldChg chg="add replId">
+        <pc:chgData name="Dmitrii Bessonov" userId="S::dmitrii_bessonov@epam.com::4c240825-8d51-4f89-bec0-b7e7687d9d22" providerId="AD" clId="Web-{E4F7CB7F-0426-0D37-2573-5BD4667ABA32}" dt="2025-05-01T06:02:29.127" v="11"/>
+        <pc:sldMkLst>
+          <pc:docMk/>
+          <pc:sldMk cId="37949583" sldId="281"/>
+        </pc:sldMkLst>
+      </pc:sldChg>
+      <pc:sldChg chg="add del replId">
+        <pc:chgData name="Dmitrii Bessonov" userId="S::dmitrii_bessonov@epam.com::4c240825-8d51-4f89-bec0-b7e7687d9d22" providerId="AD" clId="Web-{E4F7CB7F-0426-0D37-2573-5BD4667ABA32}" dt="2025-05-01T06:00:34.670" v="1"/>
+        <pc:sldMkLst>
+          <pc:docMk/>
+          <pc:sldMk cId="330742727" sldId="281"/>
+        </pc:sldMkLst>
+      </pc:sldChg>
+    </pc:docChg>
+  </pc:docChgLst>
+</pc:chgInfo>
 </file>
 
 <file path=ppt/diagrams/colors1.xml><?xml version="1.0" encoding="utf-8"?>
@@ -1680,10 +1954,10 @@
         <a:lstStyle/>
         <a:p>
           <a:r>
-            <a:rPr lang="en-US" b="0"/>
+            <a:rPr lang="en-US" b="0" dirty="0"/>
             <a:t>Basic implementation</a:t>
           </a:r>
-          <a:endParaRPr lang="en-US"/>
+          <a:endParaRPr lang="en-US" dirty="0"/>
         </a:p>
       </dgm:t>
     </dgm:pt>
@@ -1990,6 +2264,30 @@
       <dgm:prSet/>
       <dgm:spPr/>
     </dgm:pt>
+    <dgm:pt modelId="{86C394B8-070A-4E65-8CBE-66150A9CF6E4}">
+      <dgm:prSet phldr="0"/>
+      <dgm:spPr/>
+      <dgm:t>
+        <a:bodyPr/>
+        <a:lstStyle/>
+        <a:p>
+          <a:r>
+            <a:rPr lang="en-US" dirty="0">
+              <a:latin typeface="Calibri Light"/>
+            </a:rPr>
+            <a:t>Homework</a:t>
+          </a:r>
+        </a:p>
+      </dgm:t>
+    </dgm:pt>
+    <dgm:pt modelId="{9F21E6CC-6B81-4FF1-87F7-28650388EF8E}" type="parTrans" cxnId="{2CFC1475-9506-4F01-9917-65E9B4B421D6}">
+      <dgm:prSet/>
+      <dgm:spPr/>
+    </dgm:pt>
+    <dgm:pt modelId="{900D027C-D09F-4682-BB27-92370E357FDD}" type="sibTrans" cxnId="{2CFC1475-9506-4F01-9917-65E9B4B421D6}">
+      <dgm:prSet/>
+      <dgm:spPr/>
+    </dgm:pt>
     <dgm:pt modelId="{E0EBAAB6-4D8F-48E7-A41D-46A2BF8313DD}" type="pres">
       <dgm:prSet presAssocID="{74C1A7BF-A66D-4046-8A84-4F52E1D2E35A}" presName="linear" presStyleCnt="0">
         <dgm:presLayoutVars>
@@ -2000,7 +2298,7 @@
       <dgm:spPr/>
     </dgm:pt>
     <dgm:pt modelId="{279A39FB-554F-452C-9F26-8C28783D83A5}" type="pres">
-      <dgm:prSet presAssocID="{5ED216F9-AEAA-4D1A-B075-9F0CB963C95B}" presName="parentText" presStyleLbl="node1" presStyleIdx="0" presStyleCnt="9">
+      <dgm:prSet presAssocID="{5ED216F9-AEAA-4D1A-B075-9F0CB963C95B}" presName="parentText" presStyleLbl="node1" presStyleIdx="0" presStyleCnt="10">
         <dgm:presLayoutVars>
           <dgm:chMax val="0"/>
           <dgm:bulletEnabled val="1"/>
@@ -2013,7 +2311,7 @@
       <dgm:spPr/>
     </dgm:pt>
     <dgm:pt modelId="{CF9C38A0-ACCE-49CD-B02F-35CFFEE579B9}" type="pres">
-      <dgm:prSet presAssocID="{0A0F0C7C-662F-4B0F-858C-3521D687936F}" presName="parentText" presStyleLbl="node1" presStyleIdx="1" presStyleCnt="9">
+      <dgm:prSet presAssocID="{0A0F0C7C-662F-4B0F-858C-3521D687936F}" presName="parentText" presStyleLbl="node1" presStyleIdx="1" presStyleCnt="10">
         <dgm:presLayoutVars>
           <dgm:chMax val="0"/>
           <dgm:bulletEnabled val="1"/>
@@ -2026,7 +2324,7 @@
       <dgm:spPr/>
     </dgm:pt>
     <dgm:pt modelId="{604B9D72-0C57-4072-88AA-2AC6DA3A1D60}" type="pres">
-      <dgm:prSet presAssocID="{8A3D6A5D-8A42-4762-B5B5-53F3F13F346D}" presName="parentText" presStyleLbl="node1" presStyleIdx="2" presStyleCnt="9">
+      <dgm:prSet presAssocID="{8A3D6A5D-8A42-4762-B5B5-53F3F13F346D}" presName="parentText" presStyleLbl="node1" presStyleIdx="2" presStyleCnt="10">
         <dgm:presLayoutVars>
           <dgm:chMax val="0"/>
           <dgm:bulletEnabled val="1"/>
@@ -2039,7 +2337,7 @@
       <dgm:spPr/>
     </dgm:pt>
     <dgm:pt modelId="{A31D8B3D-8F4D-4FD8-B9A1-892E94D0E607}" type="pres">
-      <dgm:prSet presAssocID="{315E01E9-A641-4975-AF76-CCB5C959AA75}" presName="parentText" presStyleLbl="node1" presStyleIdx="3" presStyleCnt="9">
+      <dgm:prSet presAssocID="{315E01E9-A641-4975-AF76-CCB5C959AA75}" presName="parentText" presStyleLbl="node1" presStyleIdx="3" presStyleCnt="10">
         <dgm:presLayoutVars>
           <dgm:chMax val="0"/>
           <dgm:bulletEnabled val="1"/>
@@ -2052,7 +2350,7 @@
       <dgm:spPr/>
     </dgm:pt>
     <dgm:pt modelId="{BE1E902C-AB15-49B9-85F6-9EFD6B0CA379}" type="pres">
-      <dgm:prSet presAssocID="{68752AD0-8EDD-4418-9E3E-58558565F3DA}" presName="parentText" presStyleLbl="node1" presStyleIdx="4" presStyleCnt="9">
+      <dgm:prSet presAssocID="{68752AD0-8EDD-4418-9E3E-58558565F3DA}" presName="parentText" presStyleLbl="node1" presStyleIdx="4" presStyleCnt="10">
         <dgm:presLayoutVars>
           <dgm:chMax val="0"/>
           <dgm:bulletEnabled val="1"/>
@@ -2065,7 +2363,7 @@
       <dgm:spPr/>
     </dgm:pt>
     <dgm:pt modelId="{E2DB4B55-A055-432D-81FD-DE4A83063040}" type="pres">
-      <dgm:prSet presAssocID="{C4D56DD6-DF51-45EE-B35E-16F9F155CA2A}" presName="parentText" presStyleLbl="node1" presStyleIdx="5" presStyleCnt="9">
+      <dgm:prSet presAssocID="{C4D56DD6-DF51-45EE-B35E-16F9F155CA2A}" presName="parentText" presStyleLbl="node1" presStyleIdx="5" presStyleCnt="10">
         <dgm:presLayoutVars>
           <dgm:chMax val="0"/>
           <dgm:bulletEnabled val="1"/>
@@ -2078,7 +2376,7 @@
       <dgm:spPr/>
     </dgm:pt>
     <dgm:pt modelId="{37215F02-C632-4B16-AEA9-78266CFA1148}" type="pres">
-      <dgm:prSet presAssocID="{61E11E09-EBA2-4810-9780-81E1E8D3DDFB}" presName="parentText" presStyleLbl="node1" presStyleIdx="6" presStyleCnt="9">
+      <dgm:prSet presAssocID="{61E11E09-EBA2-4810-9780-81E1E8D3DDFB}" presName="parentText" presStyleLbl="node1" presStyleIdx="6" presStyleCnt="10">
         <dgm:presLayoutVars>
           <dgm:chMax val="0"/>
           <dgm:bulletEnabled val="1"/>
@@ -2091,7 +2389,7 @@
       <dgm:spPr/>
     </dgm:pt>
     <dgm:pt modelId="{8D979DF9-8E09-49ED-AE03-3B10241B1982}" type="pres">
-      <dgm:prSet presAssocID="{AF3A6586-0912-4C08-8DE0-7A3961E8D425}" presName="parentText" presStyleLbl="node1" presStyleIdx="7" presStyleCnt="9">
+      <dgm:prSet presAssocID="{AF3A6586-0912-4C08-8DE0-7A3961E8D425}" presName="parentText" presStyleLbl="node1" presStyleIdx="7" presStyleCnt="10">
         <dgm:presLayoutVars>
           <dgm:chMax val="0"/>
           <dgm:bulletEnabled val="1"/>
@@ -2104,7 +2402,20 @@
       <dgm:spPr/>
     </dgm:pt>
     <dgm:pt modelId="{FF6116E9-E851-4D17-A394-F143AEC75685}" type="pres">
-      <dgm:prSet presAssocID="{747AE1D7-0610-45D7-A8A6-13A502AD524D}" presName="parentText" presStyleLbl="node1" presStyleIdx="8" presStyleCnt="9">
+      <dgm:prSet presAssocID="{747AE1D7-0610-45D7-A8A6-13A502AD524D}" presName="parentText" presStyleLbl="node1" presStyleIdx="8" presStyleCnt="10">
+        <dgm:presLayoutVars>
+          <dgm:chMax val="0"/>
+          <dgm:bulletEnabled val="1"/>
+        </dgm:presLayoutVars>
+      </dgm:prSet>
+      <dgm:spPr/>
+    </dgm:pt>
+    <dgm:pt modelId="{F055B9EE-DC30-4C3F-AF99-65E8E27B87FA}" type="pres">
+      <dgm:prSet presAssocID="{1813348D-C81A-4309-B284-55B76B7D6D51}" presName="spacer" presStyleCnt="0"/>
+      <dgm:spPr/>
+    </dgm:pt>
+    <dgm:pt modelId="{1292D806-751A-4DF0-A22F-89DBA26728ED}" type="pres">
+      <dgm:prSet presAssocID="{86C394B8-070A-4E65-8CBE-66150A9CF6E4}" presName="parentText" presStyleLbl="node1" presStyleIdx="9" presStyleCnt="10">
         <dgm:presLayoutVars>
           <dgm:chMax val="0"/>
           <dgm:bulletEnabled val="1"/>
@@ -2114,42 +2425,46 @@
     </dgm:pt>
   </dgm:ptLst>
   <dgm:cxnLst>
-    <dgm:cxn modelId="{B9817609-6AA3-4215-8E0A-8DA1D7D41DF0}" type="presOf" srcId="{747AE1D7-0610-45D7-A8A6-13A502AD524D}" destId="{FF6116E9-E851-4D17-A394-F143AEC75685}" srcOrd="0" destOrd="0" presId="urn:microsoft.com/office/officeart/2005/8/layout/vList2"/>
+    <dgm:cxn modelId="{2C76ED10-173D-4AD0-AF6D-19BFC35A9FC7}" type="presOf" srcId="{0A0F0C7C-662F-4B0F-858C-3521D687936F}" destId="{CF9C38A0-ACCE-49CD-B02F-35CFFEE579B9}" srcOrd="0" destOrd="0" presId="urn:microsoft.com/office/officeart/2005/8/layout/vList2"/>
+    <dgm:cxn modelId="{2A702F15-9D6B-4DDD-B501-EF3FB890E191}" type="presOf" srcId="{315E01E9-A641-4975-AF76-CCB5C959AA75}" destId="{A31D8B3D-8F4D-4FD8-B9A1-892E94D0E607}" srcOrd="0" destOrd="0" presId="urn:microsoft.com/office/officeart/2005/8/layout/vList2"/>
     <dgm:cxn modelId="{D8775B24-9E50-4648-BD07-439E1C98D5AC}" srcId="{74C1A7BF-A66D-4046-8A84-4F52E1D2E35A}" destId="{5ED216F9-AEAA-4D1A-B075-9F0CB963C95B}" srcOrd="0" destOrd="0" parTransId="{81AC0109-5F12-4B23-964F-B214DCBF0905}" sibTransId="{0C291C09-92B1-4C5E-8687-7D95B59E80A9}"/>
     <dgm:cxn modelId="{E892C42A-0A59-46E6-8553-AC72812BAAB1}" srcId="{74C1A7BF-A66D-4046-8A84-4F52E1D2E35A}" destId="{68752AD0-8EDD-4418-9E3E-58558565F3DA}" srcOrd="4" destOrd="0" parTransId="{5B6761E3-397B-4852-905B-1B7C1F42D488}" sibTransId="{E861E931-1DC2-4DF8-9541-48B925648E27}"/>
     <dgm:cxn modelId="{1F771631-5CC4-4F9C-9700-DE9F6424C6F7}" srcId="{74C1A7BF-A66D-4046-8A84-4F52E1D2E35A}" destId="{747AE1D7-0610-45D7-A8A6-13A502AD524D}" srcOrd="8" destOrd="0" parTransId="{D334763F-5136-46DE-AADC-6251CD36E535}" sibTransId="{1813348D-C81A-4309-B284-55B76B7D6D51}"/>
     <dgm:cxn modelId="{7889B931-D076-4D8E-8F87-E4EF690067D3}" srcId="{74C1A7BF-A66D-4046-8A84-4F52E1D2E35A}" destId="{61E11E09-EBA2-4810-9780-81E1E8D3DDFB}" srcOrd="6" destOrd="0" parTransId="{F758D48E-D364-40D8-9EEE-9B15EA5A0183}" sibTransId="{FA4A6263-680A-4596-8AA7-763FC98A9A70}"/>
+    <dgm:cxn modelId="{0D6F8D3A-7618-4F80-BDAA-FCC7C8613469}" type="presOf" srcId="{AF3A6586-0912-4C08-8DE0-7A3961E8D425}" destId="{8D979DF9-8E09-49ED-AE03-3B10241B1982}" srcOrd="0" destOrd="0" presId="urn:microsoft.com/office/officeart/2005/8/layout/vList2"/>
     <dgm:cxn modelId="{19A6C03F-B862-474F-9A1C-AB56D3C3AA6F}" srcId="{74C1A7BF-A66D-4046-8A84-4F52E1D2E35A}" destId="{C4D56DD6-DF51-45EE-B35E-16F9F155CA2A}" srcOrd="5" destOrd="0" parTransId="{937E71F8-0082-4638-8635-12D9893E7384}" sibTransId="{1E89CC8B-D0C1-4DAA-ADD6-363ABDBFD1B1}"/>
     <dgm:cxn modelId="{FF175942-61DA-4B5A-B24A-38DD2D3C2D6B}" type="presOf" srcId="{74C1A7BF-A66D-4046-8A84-4F52E1D2E35A}" destId="{E0EBAAB6-4D8F-48E7-A41D-46A2BF8313DD}" srcOrd="0" destOrd="0" presId="urn:microsoft.com/office/officeart/2005/8/layout/vList2"/>
-    <dgm:cxn modelId="{C72D186A-8536-4F59-A82B-5025F24B1885}" type="presOf" srcId="{61E11E09-EBA2-4810-9780-81E1E8D3DDFB}" destId="{37215F02-C632-4B16-AEA9-78266CFA1148}" srcOrd="0" destOrd="0" presId="urn:microsoft.com/office/officeart/2005/8/layout/vList2"/>
-    <dgm:cxn modelId="{4B12334A-98A8-4989-8BD4-C3DC8C084DC3}" type="presOf" srcId="{5ED216F9-AEAA-4D1A-B075-9F0CB963C95B}" destId="{279A39FB-554F-452C-9F26-8C28783D83A5}" srcOrd="0" destOrd="0" presId="urn:microsoft.com/office/officeart/2005/8/layout/vList2"/>
+    <dgm:cxn modelId="{380FA867-8622-4F28-8786-28E1932B2492}" type="presOf" srcId="{8A3D6A5D-8A42-4762-B5B5-53F3F13F346D}" destId="{604B9D72-0C57-4072-88AA-2AC6DA3A1D60}" srcOrd="0" destOrd="0" presId="urn:microsoft.com/office/officeart/2005/8/layout/vList2"/>
+    <dgm:cxn modelId="{D563DC68-9958-4077-88FE-B7BB6E71AE81}" type="presOf" srcId="{5ED216F9-AEAA-4D1A-B075-9F0CB963C95B}" destId="{279A39FB-554F-452C-9F26-8C28783D83A5}" srcOrd="0" destOrd="0" presId="urn:microsoft.com/office/officeart/2005/8/layout/vList2"/>
     <dgm:cxn modelId="{110A076C-D2C6-4A87-8754-0345591FB1B1}" srcId="{74C1A7BF-A66D-4046-8A84-4F52E1D2E35A}" destId="{315E01E9-A641-4975-AF76-CCB5C959AA75}" srcOrd="3" destOrd="0" parTransId="{9930D74C-AB5E-42E3-81F4-A8ACF5F4C1F2}" sibTransId="{887E10E9-CEFB-4D82-80FF-84B8C55D8D5B}"/>
     <dgm:cxn modelId="{96695D6F-C695-417D-9F92-B98E8E552BB5}" srcId="{74C1A7BF-A66D-4046-8A84-4F52E1D2E35A}" destId="{AF3A6586-0912-4C08-8DE0-7A3961E8D425}" srcOrd="7" destOrd="0" parTransId="{B1DD5619-D087-4702-AF29-30741E5FFE91}" sibTransId="{26F5C985-B06C-48E3-BCDB-483B7551933E}"/>
+    <dgm:cxn modelId="{2CFC1475-9506-4F01-9917-65E9B4B421D6}" srcId="{74C1A7BF-A66D-4046-8A84-4F52E1D2E35A}" destId="{86C394B8-070A-4E65-8CBE-66150A9CF6E4}" srcOrd="9" destOrd="0" parTransId="{9F21E6CC-6B81-4FF1-87F7-28650388EF8E}" sibTransId="{900D027C-D09F-4682-BB27-92370E357FDD}"/>
+    <dgm:cxn modelId="{21566555-2C87-4926-9209-83770E279E1D}" type="presOf" srcId="{68752AD0-8EDD-4418-9E3E-58558565F3DA}" destId="{BE1E902C-AB15-49B9-85F6-9EFD6B0CA379}" srcOrd="0" destOrd="0" presId="urn:microsoft.com/office/officeart/2005/8/layout/vList2"/>
+    <dgm:cxn modelId="{22F24576-E6D3-4CB2-AAA1-84FB3A138208}" type="presOf" srcId="{C4D56DD6-DF51-45EE-B35E-16F9F155CA2A}" destId="{E2DB4B55-A055-432D-81FD-DE4A83063040}" srcOrd="0" destOrd="0" presId="urn:microsoft.com/office/officeart/2005/8/layout/vList2"/>
     <dgm:cxn modelId="{1665C97C-DDAC-4EA4-93AD-7DE17AAD38C9}" srcId="{74C1A7BF-A66D-4046-8A84-4F52E1D2E35A}" destId="{0A0F0C7C-662F-4B0F-858C-3521D687936F}" srcOrd="1" destOrd="0" parTransId="{973AD926-4C20-4779-9433-CC389EE794D8}" sibTransId="{834E4F9F-A769-4FA6-A5B4-3B4C39FCA7DD}"/>
+    <dgm:cxn modelId="{6F47C798-4BA6-4D15-9135-57570120DC02}" type="presOf" srcId="{86C394B8-070A-4E65-8CBE-66150A9CF6E4}" destId="{1292D806-751A-4DF0-A22F-89DBA26728ED}" srcOrd="0" destOrd="0" presId="urn:microsoft.com/office/officeart/2005/8/layout/vList2"/>
     <dgm:cxn modelId="{21D7949A-ACF9-4350-9103-57769A776C4E}" srcId="{74C1A7BF-A66D-4046-8A84-4F52E1D2E35A}" destId="{8A3D6A5D-8A42-4762-B5B5-53F3F13F346D}" srcOrd="2" destOrd="0" parTransId="{470DD244-8637-4B28-A6E1-64FE2F8004C1}" sibTransId="{DCDEF533-8EBB-4F5E-AD4D-2E952A0EB422}"/>
-    <dgm:cxn modelId="{84285DBD-4384-4655-A139-237620734B71}" type="presOf" srcId="{8A3D6A5D-8A42-4762-B5B5-53F3F13F346D}" destId="{604B9D72-0C57-4072-88AA-2AC6DA3A1D60}" srcOrd="0" destOrd="0" presId="urn:microsoft.com/office/officeart/2005/8/layout/vList2"/>
-    <dgm:cxn modelId="{F5C7B3C5-9D7C-411D-8520-6BCC229E2141}" type="presOf" srcId="{68752AD0-8EDD-4418-9E3E-58558565F3DA}" destId="{BE1E902C-AB15-49B9-85F6-9EFD6B0CA379}" srcOrd="0" destOrd="0" presId="urn:microsoft.com/office/officeart/2005/8/layout/vList2"/>
-    <dgm:cxn modelId="{85B7A6CF-A70F-4ACF-90BF-23483ADF4830}" type="presOf" srcId="{AF3A6586-0912-4C08-8DE0-7A3961E8D425}" destId="{8D979DF9-8E09-49ED-AE03-3B10241B1982}" srcOrd="0" destOrd="0" presId="urn:microsoft.com/office/officeart/2005/8/layout/vList2"/>
-    <dgm:cxn modelId="{4B398AD2-6956-44AA-A35D-BDA1059A9141}" type="presOf" srcId="{0A0F0C7C-662F-4B0F-858C-3521D687936F}" destId="{CF9C38A0-ACCE-49CD-B02F-35CFFEE579B9}" srcOrd="0" destOrd="0" presId="urn:microsoft.com/office/officeart/2005/8/layout/vList2"/>
-    <dgm:cxn modelId="{4515E3D9-E079-481F-ACD5-6373BC712B4C}" type="presOf" srcId="{315E01E9-A641-4975-AF76-CCB5C959AA75}" destId="{A31D8B3D-8F4D-4FD8-B9A1-892E94D0E607}" srcOrd="0" destOrd="0" presId="urn:microsoft.com/office/officeart/2005/8/layout/vList2"/>
-    <dgm:cxn modelId="{185793FB-068A-497C-9E33-44732F01CD1A}" type="presOf" srcId="{C4D56DD6-DF51-45EE-B35E-16F9F155CA2A}" destId="{E2DB4B55-A055-432D-81FD-DE4A83063040}" srcOrd="0" destOrd="0" presId="urn:microsoft.com/office/officeart/2005/8/layout/vList2"/>
-    <dgm:cxn modelId="{96BB765C-16B9-484D-86DC-5DD155D73962}" type="presParOf" srcId="{E0EBAAB6-4D8F-48E7-A41D-46A2BF8313DD}" destId="{279A39FB-554F-452C-9F26-8C28783D83A5}" srcOrd="0" destOrd="0" presId="urn:microsoft.com/office/officeart/2005/8/layout/vList2"/>
-    <dgm:cxn modelId="{0E4DEF02-65B9-45D0-B8F6-6759DDF0D6CB}" type="presParOf" srcId="{E0EBAAB6-4D8F-48E7-A41D-46A2BF8313DD}" destId="{0B749184-970B-4DFE-91CD-FE6382C4CCEC}" srcOrd="1" destOrd="0" presId="urn:microsoft.com/office/officeart/2005/8/layout/vList2"/>
-    <dgm:cxn modelId="{BA7C2DD3-3421-4948-8710-654523D3795F}" type="presParOf" srcId="{E0EBAAB6-4D8F-48E7-A41D-46A2BF8313DD}" destId="{CF9C38A0-ACCE-49CD-B02F-35CFFEE579B9}" srcOrd="2" destOrd="0" presId="urn:microsoft.com/office/officeart/2005/8/layout/vList2"/>
-    <dgm:cxn modelId="{D92BAB1A-82F0-46A0-8877-E9C59EDBD855}" type="presParOf" srcId="{E0EBAAB6-4D8F-48E7-A41D-46A2BF8313DD}" destId="{EBD970DA-E0E8-4695-B969-58FFFE4D6D76}" srcOrd="3" destOrd="0" presId="urn:microsoft.com/office/officeart/2005/8/layout/vList2"/>
-    <dgm:cxn modelId="{66C5D40F-6B57-4EC7-8E38-CDE94B7C9BEB}" type="presParOf" srcId="{E0EBAAB6-4D8F-48E7-A41D-46A2BF8313DD}" destId="{604B9D72-0C57-4072-88AA-2AC6DA3A1D60}" srcOrd="4" destOrd="0" presId="urn:microsoft.com/office/officeart/2005/8/layout/vList2"/>
-    <dgm:cxn modelId="{EDCB49EA-4F87-4558-A73D-DE157FFFBEC1}" type="presParOf" srcId="{E0EBAAB6-4D8F-48E7-A41D-46A2BF8313DD}" destId="{573F5097-AF9C-498B-87C1-53A0199E8863}" srcOrd="5" destOrd="0" presId="urn:microsoft.com/office/officeart/2005/8/layout/vList2"/>
-    <dgm:cxn modelId="{53B214D2-782C-43DD-A9FF-05C2A206D4E7}" type="presParOf" srcId="{E0EBAAB6-4D8F-48E7-A41D-46A2BF8313DD}" destId="{A31D8B3D-8F4D-4FD8-B9A1-892E94D0E607}" srcOrd="6" destOrd="0" presId="urn:microsoft.com/office/officeart/2005/8/layout/vList2"/>
-    <dgm:cxn modelId="{839BA52E-A31D-4CDB-A003-AA7B2D20F508}" type="presParOf" srcId="{E0EBAAB6-4D8F-48E7-A41D-46A2BF8313DD}" destId="{09BAE76F-4575-44D0-A0A4-9D2674E6102A}" srcOrd="7" destOrd="0" presId="urn:microsoft.com/office/officeart/2005/8/layout/vList2"/>
-    <dgm:cxn modelId="{9917F551-B2B0-4F35-94A3-81232D02519C}" type="presParOf" srcId="{E0EBAAB6-4D8F-48E7-A41D-46A2BF8313DD}" destId="{BE1E902C-AB15-49B9-85F6-9EFD6B0CA379}" srcOrd="8" destOrd="0" presId="urn:microsoft.com/office/officeart/2005/8/layout/vList2"/>
-    <dgm:cxn modelId="{FF7B9CCB-7A6B-4AAD-8C6D-F0DA2AD769DF}" type="presParOf" srcId="{E0EBAAB6-4D8F-48E7-A41D-46A2BF8313DD}" destId="{F4E20CCD-3FED-43CB-9E7E-B14AF408B399}" srcOrd="9" destOrd="0" presId="urn:microsoft.com/office/officeart/2005/8/layout/vList2"/>
-    <dgm:cxn modelId="{5EE849D1-8966-4F8C-8DF1-8FA2A3F701E6}" type="presParOf" srcId="{E0EBAAB6-4D8F-48E7-A41D-46A2BF8313DD}" destId="{E2DB4B55-A055-432D-81FD-DE4A83063040}" srcOrd="10" destOrd="0" presId="urn:microsoft.com/office/officeart/2005/8/layout/vList2"/>
-    <dgm:cxn modelId="{C940033C-2AA2-4B5D-8F3E-729898643173}" type="presParOf" srcId="{E0EBAAB6-4D8F-48E7-A41D-46A2BF8313DD}" destId="{C4C850E2-4809-4714-9DB8-6D11C07BF61C}" srcOrd="11" destOrd="0" presId="urn:microsoft.com/office/officeart/2005/8/layout/vList2"/>
-    <dgm:cxn modelId="{081BEC5D-D3EC-4095-8E36-87A78A7ADE52}" type="presParOf" srcId="{E0EBAAB6-4D8F-48E7-A41D-46A2BF8313DD}" destId="{37215F02-C632-4B16-AEA9-78266CFA1148}" srcOrd="12" destOrd="0" presId="urn:microsoft.com/office/officeart/2005/8/layout/vList2"/>
-    <dgm:cxn modelId="{2B1AA3E5-F59C-47D6-9411-23F84B6580E6}" type="presParOf" srcId="{E0EBAAB6-4D8F-48E7-A41D-46A2BF8313DD}" destId="{CFD0261D-BCEB-428C-927A-833387B116DF}" srcOrd="13" destOrd="0" presId="urn:microsoft.com/office/officeart/2005/8/layout/vList2"/>
-    <dgm:cxn modelId="{D94C3CFB-399E-4E60-BE5C-EC4B60BF5E56}" type="presParOf" srcId="{E0EBAAB6-4D8F-48E7-A41D-46A2BF8313DD}" destId="{8D979DF9-8E09-49ED-AE03-3B10241B1982}" srcOrd="14" destOrd="0" presId="urn:microsoft.com/office/officeart/2005/8/layout/vList2"/>
-    <dgm:cxn modelId="{5BB40D91-093C-4FD3-BF51-EB063D98C44D}" type="presParOf" srcId="{E0EBAAB6-4D8F-48E7-A41D-46A2BF8313DD}" destId="{907D3D7E-3106-49F2-AF93-92F80D1BDEF4}" srcOrd="15" destOrd="0" presId="urn:microsoft.com/office/officeart/2005/8/layout/vList2"/>
-    <dgm:cxn modelId="{3A6D095E-E5E8-48E6-998D-806E6BA0AF65}" type="presParOf" srcId="{E0EBAAB6-4D8F-48E7-A41D-46A2BF8313DD}" destId="{FF6116E9-E851-4D17-A394-F143AEC75685}" srcOrd="16" destOrd="0" presId="urn:microsoft.com/office/officeart/2005/8/layout/vList2"/>
+    <dgm:cxn modelId="{78E5DAB8-C4AD-4908-A740-62E295E24F93}" type="presOf" srcId="{61E11E09-EBA2-4810-9780-81E1E8D3DDFB}" destId="{37215F02-C632-4B16-AEA9-78266CFA1148}" srcOrd="0" destOrd="0" presId="urn:microsoft.com/office/officeart/2005/8/layout/vList2"/>
+    <dgm:cxn modelId="{2603A3DF-B795-49F3-85D4-7965C7639572}" type="presOf" srcId="{747AE1D7-0610-45D7-A8A6-13A502AD524D}" destId="{FF6116E9-E851-4D17-A394-F143AEC75685}" srcOrd="0" destOrd="0" presId="urn:microsoft.com/office/officeart/2005/8/layout/vList2"/>
+    <dgm:cxn modelId="{ED6D15BA-3B2A-4456-9A30-B6B7C6F44E7C}" type="presParOf" srcId="{E0EBAAB6-4D8F-48E7-A41D-46A2BF8313DD}" destId="{279A39FB-554F-452C-9F26-8C28783D83A5}" srcOrd="0" destOrd="0" presId="urn:microsoft.com/office/officeart/2005/8/layout/vList2"/>
+    <dgm:cxn modelId="{2EF96BCF-EAAA-46C5-BA6C-8A2DE2A2500B}" type="presParOf" srcId="{E0EBAAB6-4D8F-48E7-A41D-46A2BF8313DD}" destId="{0B749184-970B-4DFE-91CD-FE6382C4CCEC}" srcOrd="1" destOrd="0" presId="urn:microsoft.com/office/officeart/2005/8/layout/vList2"/>
+    <dgm:cxn modelId="{5ABE808C-41B5-4861-9D4C-7042490BCA74}" type="presParOf" srcId="{E0EBAAB6-4D8F-48E7-A41D-46A2BF8313DD}" destId="{CF9C38A0-ACCE-49CD-B02F-35CFFEE579B9}" srcOrd="2" destOrd="0" presId="urn:microsoft.com/office/officeart/2005/8/layout/vList2"/>
+    <dgm:cxn modelId="{252DE2F1-E6E0-45F5-8E02-A3B9B4D72B9D}" type="presParOf" srcId="{E0EBAAB6-4D8F-48E7-A41D-46A2BF8313DD}" destId="{EBD970DA-E0E8-4695-B969-58FFFE4D6D76}" srcOrd="3" destOrd="0" presId="urn:microsoft.com/office/officeart/2005/8/layout/vList2"/>
+    <dgm:cxn modelId="{442F53FD-1095-4882-86BF-FDC9D2B1A598}" type="presParOf" srcId="{E0EBAAB6-4D8F-48E7-A41D-46A2BF8313DD}" destId="{604B9D72-0C57-4072-88AA-2AC6DA3A1D60}" srcOrd="4" destOrd="0" presId="urn:microsoft.com/office/officeart/2005/8/layout/vList2"/>
+    <dgm:cxn modelId="{EC0F14D6-1B6A-404B-A545-80B9FE71BCA3}" type="presParOf" srcId="{E0EBAAB6-4D8F-48E7-A41D-46A2BF8313DD}" destId="{573F5097-AF9C-498B-87C1-53A0199E8863}" srcOrd="5" destOrd="0" presId="urn:microsoft.com/office/officeart/2005/8/layout/vList2"/>
+    <dgm:cxn modelId="{863EEA65-6CC6-4949-AD2D-D7F7D11F8DF9}" type="presParOf" srcId="{E0EBAAB6-4D8F-48E7-A41D-46A2BF8313DD}" destId="{A31D8B3D-8F4D-4FD8-B9A1-892E94D0E607}" srcOrd="6" destOrd="0" presId="urn:microsoft.com/office/officeart/2005/8/layout/vList2"/>
+    <dgm:cxn modelId="{C557048E-7164-4CD9-AAA0-ADD6760D6073}" type="presParOf" srcId="{E0EBAAB6-4D8F-48E7-A41D-46A2BF8313DD}" destId="{09BAE76F-4575-44D0-A0A4-9D2674E6102A}" srcOrd="7" destOrd="0" presId="urn:microsoft.com/office/officeart/2005/8/layout/vList2"/>
+    <dgm:cxn modelId="{8E52036A-A83F-4DA7-BC83-9D21F99FABB5}" type="presParOf" srcId="{E0EBAAB6-4D8F-48E7-A41D-46A2BF8313DD}" destId="{BE1E902C-AB15-49B9-85F6-9EFD6B0CA379}" srcOrd="8" destOrd="0" presId="urn:microsoft.com/office/officeart/2005/8/layout/vList2"/>
+    <dgm:cxn modelId="{81D039A1-414E-4784-BA84-702B05D3B2D3}" type="presParOf" srcId="{E0EBAAB6-4D8F-48E7-A41D-46A2BF8313DD}" destId="{F4E20CCD-3FED-43CB-9E7E-B14AF408B399}" srcOrd="9" destOrd="0" presId="urn:microsoft.com/office/officeart/2005/8/layout/vList2"/>
+    <dgm:cxn modelId="{C4934D53-5F30-495C-869E-582F4451C734}" type="presParOf" srcId="{E0EBAAB6-4D8F-48E7-A41D-46A2BF8313DD}" destId="{E2DB4B55-A055-432D-81FD-DE4A83063040}" srcOrd="10" destOrd="0" presId="urn:microsoft.com/office/officeart/2005/8/layout/vList2"/>
+    <dgm:cxn modelId="{A39A30FC-AFEA-4A53-BC3C-1200AC410277}" type="presParOf" srcId="{E0EBAAB6-4D8F-48E7-A41D-46A2BF8313DD}" destId="{C4C850E2-4809-4714-9DB8-6D11C07BF61C}" srcOrd="11" destOrd="0" presId="urn:microsoft.com/office/officeart/2005/8/layout/vList2"/>
+    <dgm:cxn modelId="{DB37F8FF-9890-4415-B6B0-C25FE9B4331F}" type="presParOf" srcId="{E0EBAAB6-4D8F-48E7-A41D-46A2BF8313DD}" destId="{37215F02-C632-4B16-AEA9-78266CFA1148}" srcOrd="12" destOrd="0" presId="urn:microsoft.com/office/officeart/2005/8/layout/vList2"/>
+    <dgm:cxn modelId="{B42CD7A6-6468-4FCD-8A11-B39979423593}" type="presParOf" srcId="{E0EBAAB6-4D8F-48E7-A41D-46A2BF8313DD}" destId="{CFD0261D-BCEB-428C-927A-833387B116DF}" srcOrd="13" destOrd="0" presId="urn:microsoft.com/office/officeart/2005/8/layout/vList2"/>
+    <dgm:cxn modelId="{81EA63FF-20E2-4610-9158-49009938E5E5}" type="presParOf" srcId="{E0EBAAB6-4D8F-48E7-A41D-46A2BF8313DD}" destId="{8D979DF9-8E09-49ED-AE03-3B10241B1982}" srcOrd="14" destOrd="0" presId="urn:microsoft.com/office/officeart/2005/8/layout/vList2"/>
+    <dgm:cxn modelId="{1E16C733-0E25-41DB-B6D4-C176AA748999}" type="presParOf" srcId="{E0EBAAB6-4D8F-48E7-A41D-46A2BF8313DD}" destId="{907D3D7E-3106-49F2-AF93-92F80D1BDEF4}" srcOrd="15" destOrd="0" presId="urn:microsoft.com/office/officeart/2005/8/layout/vList2"/>
+    <dgm:cxn modelId="{1DB1FD63-FAEC-415F-8411-F850E2E3566B}" type="presParOf" srcId="{E0EBAAB6-4D8F-48E7-A41D-46A2BF8313DD}" destId="{FF6116E9-E851-4D17-A394-F143AEC75685}" srcOrd="16" destOrd="0" presId="urn:microsoft.com/office/officeart/2005/8/layout/vList2"/>
+    <dgm:cxn modelId="{1C8A5020-1834-4D7D-9444-9B2EC505277C}" type="presParOf" srcId="{E0EBAAB6-4D8F-48E7-A41D-46A2BF8313DD}" destId="{F055B9EE-DC30-4C3F-AF99-65E8E27B87FA}" srcOrd="17" destOrd="0" presId="urn:microsoft.com/office/officeart/2005/8/layout/vList2"/>
+    <dgm:cxn modelId="{1D6297BD-C487-4BB5-A750-FDE66F49E561}" type="presParOf" srcId="{E0EBAAB6-4D8F-48E7-A41D-46A2BF8313DD}" destId="{1292D806-751A-4DF0-A22F-89DBA26728ED}" srcOrd="18" destOrd="0" presId="urn:microsoft.com/office/officeart/2005/8/layout/vList2"/>
   </dgm:cxnLst>
   <dgm:bg/>
   <dgm:whole/>
@@ -2499,8 +2814,8 @@
       </dsp:nvSpPr>
       <dsp:spPr>
         <a:xfrm>
-          <a:off x="0" y="93745"/>
-          <a:ext cx="3993357" cy="287819"/>
+          <a:off x="0" y="65439"/>
+          <a:ext cx="3993357" cy="263835"/>
         </a:xfrm>
         <a:prstGeom prst="roundRect">
           <a:avLst/>
@@ -2542,12 +2857,12 @@
         </a:fontRef>
       </dsp:style>
       <dsp:txBody>
-        <a:bodyPr spcFirstLastPara="0" vert="horz" wrap="square" lIns="45720" tIns="45720" rIns="45720" bIns="45720" numCol="1" spcCol="1270" anchor="ctr" anchorCtr="0">
+        <a:bodyPr spcFirstLastPara="0" vert="horz" wrap="square" lIns="41910" tIns="41910" rIns="41910" bIns="41910" numCol="1" spcCol="1270" anchor="ctr" anchorCtr="0">
           <a:noAutofit/>
         </a:bodyPr>
         <a:lstStyle/>
         <a:p>
-          <a:pPr marL="0" lvl="0" indent="0" algn="l" defTabSz="533400">
+          <a:pPr marL="0" lvl="0" indent="0" algn="l" defTabSz="488950">
             <a:lnSpc>
               <a:spcPct val="90000"/>
             </a:lnSpc>
@@ -2560,15 +2875,15 @@
             <a:buNone/>
           </a:pPr>
           <a:r>
-            <a:rPr lang="en-US" sz="1200" b="0" kern="1200"/>
+            <a:rPr lang="en-US" sz="1100" b="0" kern="1200" dirty="0"/>
             <a:t>Basic implementation</a:t>
           </a:r>
-          <a:endParaRPr lang="en-US" sz="1200" kern="1200"/>
+          <a:endParaRPr lang="en-US" sz="1100" kern="1200" dirty="0"/>
         </a:p>
       </dsp:txBody>
       <dsp:txXfrm>
-        <a:off x="14050" y="107795"/>
-        <a:ext cx="3965257" cy="259719"/>
+        <a:off x="12879" y="78318"/>
+        <a:ext cx="3967599" cy="238077"/>
       </dsp:txXfrm>
     </dsp:sp>
     <dsp:sp modelId="{CF9C38A0-ACCE-49CD-B02F-35CFFEE579B9}">
@@ -2578,8 +2893,8 @@
       </dsp:nvSpPr>
       <dsp:spPr>
         <a:xfrm>
-          <a:off x="0" y="416125"/>
-          <a:ext cx="3993357" cy="287819"/>
+          <a:off x="0" y="360954"/>
+          <a:ext cx="3993357" cy="263835"/>
         </a:xfrm>
         <a:prstGeom prst="roundRect">
           <a:avLst/>
@@ -2621,12 +2936,12 @@
         </a:fontRef>
       </dsp:style>
       <dsp:txBody>
-        <a:bodyPr spcFirstLastPara="0" vert="horz" wrap="square" lIns="45720" tIns="45720" rIns="45720" bIns="45720" numCol="1" spcCol="1270" anchor="ctr" anchorCtr="0">
+        <a:bodyPr spcFirstLastPara="0" vert="horz" wrap="square" lIns="41910" tIns="41910" rIns="41910" bIns="41910" numCol="1" spcCol="1270" anchor="ctr" anchorCtr="0">
           <a:noAutofit/>
         </a:bodyPr>
         <a:lstStyle/>
         <a:p>
-          <a:pPr marL="0" lvl="0" indent="0" algn="l" defTabSz="533400">
+          <a:pPr marL="0" lvl="0" indent="0" algn="l" defTabSz="488950">
             <a:lnSpc>
               <a:spcPct val="90000"/>
             </a:lnSpc>
@@ -2639,15 +2954,15 @@
             <a:buNone/>
           </a:pPr>
           <a:r>
-            <a:rPr lang="en-US" sz="1200" b="0" kern="1200" dirty="0"/>
+            <a:rPr lang="en-US" sz="1100" b="0" kern="1200" dirty="0"/>
             <a:t>Switch to pattern matching</a:t>
           </a:r>
-          <a:endParaRPr lang="en-US" sz="1200" kern="1200" dirty="0"/>
+          <a:endParaRPr lang="en-US" sz="1100" kern="1200" dirty="0"/>
         </a:p>
       </dsp:txBody>
       <dsp:txXfrm>
-        <a:off x="14050" y="430175"/>
-        <a:ext cx="3965257" cy="259719"/>
+        <a:off x="12879" y="373833"/>
+        <a:ext cx="3967599" cy="238077"/>
       </dsp:txXfrm>
     </dsp:sp>
     <dsp:sp modelId="{604B9D72-0C57-4072-88AA-2AC6DA3A1D60}">
@@ -2657,8 +2972,8 @@
       </dsp:nvSpPr>
       <dsp:spPr>
         <a:xfrm>
-          <a:off x="0" y="738505"/>
-          <a:ext cx="3993357" cy="287819"/>
+          <a:off x="0" y="656469"/>
+          <a:ext cx="3993357" cy="263835"/>
         </a:xfrm>
         <a:prstGeom prst="roundRect">
           <a:avLst/>
@@ -2700,12 +3015,12 @@
         </a:fontRef>
       </dsp:style>
       <dsp:txBody>
-        <a:bodyPr spcFirstLastPara="0" vert="horz" wrap="square" lIns="45720" tIns="45720" rIns="45720" bIns="45720" numCol="1" spcCol="1270" anchor="ctr" anchorCtr="0">
+        <a:bodyPr spcFirstLastPara="0" vert="horz" wrap="square" lIns="41910" tIns="41910" rIns="41910" bIns="41910" numCol="1" spcCol="1270" anchor="ctr" anchorCtr="0">
           <a:noAutofit/>
         </a:bodyPr>
         <a:lstStyle/>
         <a:p>
-          <a:pPr marL="0" lvl="0" indent="0" algn="l" defTabSz="533400">
+          <a:pPr marL="0" lvl="0" indent="0" algn="l" defTabSz="488950">
             <a:lnSpc>
               <a:spcPct val="90000"/>
             </a:lnSpc>
@@ -2718,15 +3033,15 @@
             <a:buNone/>
           </a:pPr>
           <a:r>
-            <a:rPr lang="en-US" sz="1200" b="0" kern="1200" dirty="0"/>
+            <a:rPr lang="en-US" sz="1100" b="0" kern="1200" dirty="0"/>
             <a:t>Switch to Visitor pattern</a:t>
           </a:r>
-          <a:endParaRPr lang="en-US" sz="1200" kern="1200" dirty="0"/>
+          <a:endParaRPr lang="en-US" sz="1100" kern="1200" dirty="0"/>
         </a:p>
       </dsp:txBody>
       <dsp:txXfrm>
-        <a:off x="14050" y="752555"/>
-        <a:ext cx="3965257" cy="259719"/>
+        <a:off x="12879" y="669348"/>
+        <a:ext cx="3967599" cy="238077"/>
       </dsp:txXfrm>
     </dsp:sp>
     <dsp:sp modelId="{A31D8B3D-8F4D-4FD8-B9A1-892E94D0E607}">
@@ -2736,8 +3051,8 @@
       </dsp:nvSpPr>
       <dsp:spPr>
         <a:xfrm>
-          <a:off x="0" y="1060885"/>
-          <a:ext cx="3993357" cy="287819"/>
+          <a:off x="0" y="951985"/>
+          <a:ext cx="3993357" cy="263835"/>
         </a:xfrm>
         <a:prstGeom prst="roundRect">
           <a:avLst/>
@@ -2779,12 +3094,12 @@
         </a:fontRef>
       </dsp:style>
       <dsp:txBody>
-        <a:bodyPr spcFirstLastPara="0" vert="horz" wrap="square" lIns="45720" tIns="45720" rIns="45720" bIns="45720" numCol="1" spcCol="1270" anchor="ctr" anchorCtr="0">
+        <a:bodyPr spcFirstLastPara="0" vert="horz" wrap="square" lIns="41910" tIns="41910" rIns="41910" bIns="41910" numCol="1" spcCol="1270" anchor="ctr" anchorCtr="0">
           <a:noAutofit/>
         </a:bodyPr>
         <a:lstStyle/>
         <a:p>
-          <a:pPr marL="0" lvl="0" indent="0" algn="l" defTabSz="533400">
+          <a:pPr marL="0" lvl="0" indent="0" algn="l" defTabSz="488950">
             <a:lnSpc>
               <a:spcPct val="90000"/>
             </a:lnSpc>
@@ -2797,15 +3112,15 @@
             <a:buNone/>
           </a:pPr>
           <a:r>
-            <a:rPr lang="en-US" sz="1200" b="0" kern="1200" dirty="0"/>
+            <a:rPr lang="en-US" sz="1100" b="0" kern="1200" dirty="0"/>
             <a:t>Extend implementation</a:t>
           </a:r>
-          <a:endParaRPr lang="en-US" sz="1200" kern="1200" dirty="0"/>
+          <a:endParaRPr lang="en-US" sz="1100" kern="1200" dirty="0"/>
         </a:p>
       </dsp:txBody>
       <dsp:txXfrm>
-        <a:off x="14050" y="1074935"/>
-        <a:ext cx="3965257" cy="259719"/>
+        <a:off x="12879" y="964864"/>
+        <a:ext cx="3967599" cy="238077"/>
       </dsp:txXfrm>
     </dsp:sp>
     <dsp:sp modelId="{BE1E902C-AB15-49B9-85F6-9EFD6B0CA379}">
@@ -2815,8 +3130,8 @@
       </dsp:nvSpPr>
       <dsp:spPr>
         <a:xfrm>
-          <a:off x="0" y="1383265"/>
-          <a:ext cx="3993357" cy="287819"/>
+          <a:off x="0" y="1247500"/>
+          <a:ext cx="3993357" cy="263835"/>
         </a:xfrm>
         <a:prstGeom prst="roundRect">
           <a:avLst/>
@@ -2858,12 +3173,12 @@
         </a:fontRef>
       </dsp:style>
       <dsp:txBody>
-        <a:bodyPr spcFirstLastPara="0" vert="horz" wrap="square" lIns="45720" tIns="45720" rIns="45720" bIns="45720" numCol="1" spcCol="1270" anchor="ctr" anchorCtr="0">
+        <a:bodyPr spcFirstLastPara="0" vert="horz" wrap="square" lIns="41910" tIns="41910" rIns="41910" bIns="41910" numCol="1" spcCol="1270" anchor="ctr" anchorCtr="0">
           <a:noAutofit/>
         </a:bodyPr>
         <a:lstStyle/>
         <a:p>
-          <a:pPr marL="0" lvl="0" indent="0" algn="l" defTabSz="533400">
+          <a:pPr marL="0" lvl="0" indent="0" algn="l" defTabSz="488950">
             <a:lnSpc>
               <a:spcPct val="90000"/>
             </a:lnSpc>
@@ -2876,15 +3191,15 @@
             <a:buNone/>
           </a:pPr>
           <a:r>
-            <a:rPr lang="en-US" sz="1200" b="0" kern="1200" dirty="0"/>
+            <a:rPr lang="en-US" sz="1100" b="0" kern="1200" dirty="0"/>
             <a:t>- Visitor with state</a:t>
           </a:r>
-          <a:endParaRPr lang="en-US" sz="1200" kern="1200" dirty="0"/>
+          <a:endParaRPr lang="en-US" sz="1100" kern="1200" dirty="0"/>
         </a:p>
       </dsp:txBody>
       <dsp:txXfrm>
-        <a:off x="14050" y="1397315"/>
-        <a:ext cx="3965257" cy="259719"/>
+        <a:off x="12879" y="1260379"/>
+        <a:ext cx="3967599" cy="238077"/>
       </dsp:txXfrm>
     </dsp:sp>
     <dsp:sp modelId="{E2DB4B55-A055-432D-81FD-DE4A83063040}">
@@ -2894,8 +3209,8 @@
       </dsp:nvSpPr>
       <dsp:spPr>
         <a:xfrm>
-          <a:off x="0" y="1705645"/>
-          <a:ext cx="3993357" cy="287819"/>
+          <a:off x="0" y="1543015"/>
+          <a:ext cx="3993357" cy="263835"/>
         </a:xfrm>
         <a:prstGeom prst="roundRect">
           <a:avLst/>
@@ -2937,12 +3252,12 @@
         </a:fontRef>
       </dsp:style>
       <dsp:txBody>
-        <a:bodyPr spcFirstLastPara="0" vert="horz" wrap="square" lIns="45720" tIns="45720" rIns="45720" bIns="45720" numCol="1" spcCol="1270" anchor="ctr" anchorCtr="0">
+        <a:bodyPr spcFirstLastPara="0" vert="horz" wrap="square" lIns="41910" tIns="41910" rIns="41910" bIns="41910" numCol="1" spcCol="1270" anchor="ctr" anchorCtr="0">
           <a:noAutofit/>
         </a:bodyPr>
         <a:lstStyle/>
         <a:p>
-          <a:pPr marL="0" lvl="0" indent="0" algn="l" defTabSz="533400">
+          <a:pPr marL="0" lvl="0" indent="0" algn="l" defTabSz="488950">
             <a:lnSpc>
               <a:spcPct val="90000"/>
             </a:lnSpc>
@@ -2955,15 +3270,15 @@
             <a:buNone/>
           </a:pPr>
           <a:r>
-            <a:rPr lang="en-US" sz="1200" b="0" kern="1200" dirty="0"/>
+            <a:rPr lang="en-US" sz="1100" b="0" kern="1200" dirty="0"/>
             <a:t>- Visitor with currying</a:t>
           </a:r>
-          <a:endParaRPr lang="en-US" sz="1200" kern="1200" dirty="0"/>
+          <a:endParaRPr lang="en-US" sz="1100" kern="1200" dirty="0"/>
         </a:p>
       </dsp:txBody>
       <dsp:txXfrm>
-        <a:off x="14050" y="1719695"/>
-        <a:ext cx="3965257" cy="259719"/>
+        <a:off x="12879" y="1555894"/>
+        <a:ext cx="3967599" cy="238077"/>
       </dsp:txXfrm>
     </dsp:sp>
     <dsp:sp modelId="{37215F02-C632-4B16-AEA9-78266CFA1148}">
@@ -2973,8 +3288,8 @@
       </dsp:nvSpPr>
       <dsp:spPr>
         <a:xfrm>
-          <a:off x="0" y="2028025"/>
-          <a:ext cx="3993357" cy="287819"/>
+          <a:off x="0" y="1838530"/>
+          <a:ext cx="3993357" cy="263835"/>
         </a:xfrm>
         <a:prstGeom prst="roundRect">
           <a:avLst/>
@@ -3016,12 +3331,12 @@
         </a:fontRef>
       </dsp:style>
       <dsp:txBody>
-        <a:bodyPr spcFirstLastPara="0" vert="horz" wrap="square" lIns="45720" tIns="45720" rIns="45720" bIns="45720" numCol="1" spcCol="1270" anchor="ctr" anchorCtr="0">
+        <a:bodyPr spcFirstLastPara="0" vert="horz" wrap="square" lIns="41910" tIns="41910" rIns="41910" bIns="41910" numCol="1" spcCol="1270" anchor="ctr" anchorCtr="0">
           <a:noAutofit/>
         </a:bodyPr>
         <a:lstStyle/>
         <a:p>
-          <a:pPr marL="0" lvl="0" indent="0" algn="l" defTabSz="533400">
+          <a:pPr marL="0" lvl="0" indent="0" algn="l" defTabSz="488950">
             <a:lnSpc>
               <a:spcPct val="90000"/>
             </a:lnSpc>
@@ -3034,15 +3349,15 @@
             <a:buNone/>
           </a:pPr>
           <a:r>
-            <a:rPr lang="en-US" sz="1200" b="0" kern="1200" dirty="0"/>
+            <a:rPr lang="en-US" sz="1100" b="0" kern="1200" dirty="0"/>
             <a:t>- Universal visitor</a:t>
           </a:r>
-          <a:endParaRPr lang="en-US" sz="1200" kern="1200" dirty="0"/>
+          <a:endParaRPr lang="en-US" sz="1100" kern="1200" dirty="0"/>
         </a:p>
       </dsp:txBody>
       <dsp:txXfrm>
-        <a:off x="14050" y="2042075"/>
-        <a:ext cx="3965257" cy="259719"/>
+        <a:off x="12879" y="1851409"/>
+        <a:ext cx="3967599" cy="238077"/>
       </dsp:txXfrm>
     </dsp:sp>
     <dsp:sp modelId="{8D979DF9-8E09-49ED-AE03-3B10241B1982}">
@@ -3052,8 +3367,8 @@
       </dsp:nvSpPr>
       <dsp:spPr>
         <a:xfrm>
-          <a:off x="0" y="2350405"/>
-          <a:ext cx="3993357" cy="287819"/>
+          <a:off x="0" y="2134045"/>
+          <a:ext cx="3993357" cy="263835"/>
         </a:xfrm>
         <a:prstGeom prst="roundRect">
           <a:avLst/>
@@ -3095,12 +3410,12 @@
         </a:fontRef>
       </dsp:style>
       <dsp:txBody>
-        <a:bodyPr spcFirstLastPara="0" vert="horz" wrap="square" lIns="45720" tIns="45720" rIns="45720" bIns="45720" numCol="1" spcCol="1270" anchor="ctr" anchorCtr="0">
+        <a:bodyPr spcFirstLastPara="0" vert="horz" wrap="square" lIns="41910" tIns="41910" rIns="41910" bIns="41910" numCol="1" spcCol="1270" anchor="ctr" anchorCtr="0">
           <a:noAutofit/>
         </a:bodyPr>
         <a:lstStyle/>
         <a:p>
-          <a:pPr marL="0" lvl="0" indent="0" algn="l" defTabSz="533400">
+          <a:pPr marL="0" lvl="0" indent="0" algn="l" defTabSz="488950">
             <a:lnSpc>
               <a:spcPct val="90000"/>
             </a:lnSpc>
@@ -3113,15 +3428,15 @@
             <a:buNone/>
           </a:pPr>
           <a:r>
-            <a:rPr lang="en-US" sz="1200" b="0" kern="1200" dirty="0"/>
+            <a:rPr lang="en-US" sz="1100" b="0" kern="1200" dirty="0"/>
             <a:t>Compare with switch</a:t>
           </a:r>
-          <a:endParaRPr lang="en-US" sz="1200" kern="1200" dirty="0"/>
+          <a:endParaRPr lang="en-US" sz="1100" kern="1200" dirty="0"/>
         </a:p>
       </dsp:txBody>
       <dsp:txXfrm>
-        <a:off x="14050" y="2364455"/>
-        <a:ext cx="3965257" cy="259719"/>
+        <a:off x="12879" y="2146924"/>
+        <a:ext cx="3967599" cy="238077"/>
       </dsp:txXfrm>
     </dsp:sp>
     <dsp:sp modelId="{FF6116E9-E851-4D17-A394-F143AEC75685}">
@@ -3131,8 +3446,8 @@
       </dsp:nvSpPr>
       <dsp:spPr>
         <a:xfrm>
-          <a:off x="0" y="2672785"/>
-          <a:ext cx="3993357" cy="287819"/>
+          <a:off x="0" y="2429560"/>
+          <a:ext cx="3993357" cy="263835"/>
         </a:xfrm>
         <a:prstGeom prst="roundRect">
           <a:avLst/>
@@ -3174,12 +3489,12 @@
         </a:fontRef>
       </dsp:style>
       <dsp:txBody>
-        <a:bodyPr spcFirstLastPara="0" vert="horz" wrap="square" lIns="45720" tIns="45720" rIns="45720" bIns="45720" numCol="1" spcCol="1270" anchor="ctr" anchorCtr="0">
+        <a:bodyPr spcFirstLastPara="0" vert="horz" wrap="square" lIns="41910" tIns="41910" rIns="41910" bIns="41910" numCol="1" spcCol="1270" anchor="ctr" anchorCtr="0">
           <a:noAutofit/>
         </a:bodyPr>
         <a:lstStyle/>
         <a:p>
-          <a:pPr marL="0" lvl="0" indent="0" algn="l" defTabSz="533400">
+          <a:pPr marL="0" lvl="0" indent="0" algn="l" defTabSz="488950">
             <a:lnSpc>
               <a:spcPct val="90000"/>
             </a:lnSpc>
@@ -3192,14 +3507,94 @@
             <a:buNone/>
           </a:pPr>
           <a:r>
-            <a:rPr lang="en-US" sz="1200" kern="1200" dirty="0"/>
+            <a:rPr lang="en-US" sz="1100" kern="1200" dirty="0"/>
             <a:t>Production examples</a:t>
           </a:r>
         </a:p>
       </dsp:txBody>
       <dsp:txXfrm>
-        <a:off x="14050" y="2686835"/>
-        <a:ext cx="3965257" cy="259719"/>
+        <a:off x="12879" y="2442439"/>
+        <a:ext cx="3967599" cy="238077"/>
+      </dsp:txXfrm>
+    </dsp:sp>
+    <dsp:sp modelId="{1292D806-751A-4DF0-A22F-89DBA26728ED}">
+      <dsp:nvSpPr>
+        <dsp:cNvPr id="0" name=""/>
+        <dsp:cNvSpPr/>
+      </dsp:nvSpPr>
+      <dsp:spPr>
+        <a:xfrm>
+          <a:off x="0" y="2725075"/>
+          <a:ext cx="3993357" cy="263835"/>
+        </a:xfrm>
+        <a:prstGeom prst="roundRect">
+          <a:avLst/>
+        </a:prstGeom>
+        <a:solidFill>
+          <a:schemeClr val="accent2">
+            <a:hueOff val="0"/>
+            <a:satOff val="0"/>
+            <a:lumOff val="0"/>
+            <a:alphaOff val="0"/>
+          </a:schemeClr>
+        </a:solidFill>
+        <a:ln w="19050" cap="flat" cmpd="sng" algn="ctr">
+          <a:solidFill>
+            <a:schemeClr val="lt1">
+              <a:hueOff val="0"/>
+              <a:satOff val="0"/>
+              <a:lumOff val="0"/>
+              <a:alphaOff val="0"/>
+            </a:schemeClr>
+          </a:solidFill>
+          <a:prstDash val="solid"/>
+          <a:miter lim="800000"/>
+        </a:ln>
+        <a:effectLst/>
+      </dsp:spPr>
+      <dsp:style>
+        <a:lnRef idx="3">
+          <a:scrgbClr r="0" g="0" b="0"/>
+        </a:lnRef>
+        <a:fillRef idx="1">
+          <a:scrgbClr r="0" g="0" b="0"/>
+        </a:fillRef>
+        <a:effectRef idx="1">
+          <a:scrgbClr r="0" g="0" b="0"/>
+        </a:effectRef>
+        <a:fontRef idx="minor">
+          <a:schemeClr val="lt1"/>
+        </a:fontRef>
+      </dsp:style>
+      <dsp:txBody>
+        <a:bodyPr spcFirstLastPara="0" vert="horz" wrap="square" lIns="41910" tIns="41910" rIns="41910" bIns="41910" numCol="1" spcCol="1270" anchor="ctr" anchorCtr="0">
+          <a:noAutofit/>
+        </a:bodyPr>
+        <a:lstStyle/>
+        <a:p>
+          <a:pPr marL="0" lvl="0" indent="0" algn="l" defTabSz="488950">
+            <a:lnSpc>
+              <a:spcPct val="90000"/>
+            </a:lnSpc>
+            <a:spcBef>
+              <a:spcPct val="0"/>
+            </a:spcBef>
+            <a:spcAft>
+              <a:spcPct val="35000"/>
+            </a:spcAft>
+            <a:buNone/>
+          </a:pPr>
+          <a:r>
+            <a:rPr lang="en-US" sz="1100" kern="1200" dirty="0">
+              <a:latin typeface="Calibri Light"/>
+            </a:rPr>
+            <a:t>Homework</a:t>
+          </a:r>
+        </a:p>
+      </dsp:txBody>
+      <dsp:txXfrm>
+        <a:off x="12879" y="2737954"/>
+        <a:ext cx="3967599" cy="238077"/>
       </dsp:txXfrm>
     </dsp:sp>
   </dsp:spTree>
@@ -6285,7 +6680,7 @@
           <a:p>
             <a:fld id="{3FDC14FC-A894-4869-A797-1EC82735D106}" type="datetimeFigureOut">
               <a:rPr lang="en-US" smtClean="0"/>
-              <a:t>3/5/2025</a:t>
+              <a:t>4/30/2025</a:t>
             </a:fld>
             <a:endParaRPr lang="en-US" dirty="0"/>
           </a:p>
@@ -6450,7 +6845,7 @@
           <a:p>
             <a:fld id="{B4F99C05-63F9-4248-8E20-3ACD9DF9DE7F}" type="datetimeFigureOut">
               <a:rPr lang="en-US" smtClean="0"/>
-              <a:t>3/5/2025</a:t>
+              <a:t>4/30/2025</a:t>
             </a:fld>
             <a:endParaRPr lang="en-US" dirty="0"/>
           </a:p>
@@ -6715,248 +7110,6 @@
     </a:lvl9pPr>
   </p:notesStyle>
 </p:notesMaster>
-</file>
-
-<file path=ppt/notesSlides/notesSlide1.xml><?xml version="1.0" encoding="utf-8"?>
-<p:notes xmlns:a="http://schemas.openxmlformats.org/drawingml/2006/main" xmlns:r="http://schemas.openxmlformats.org/officeDocument/2006/relationships" xmlns:p="http://schemas.openxmlformats.org/presentationml/2006/main">
-  <p:cSld>
-    <p:spTree>
-      <p:nvGrpSpPr>
-        <p:cNvPr id="1" name=""/>
-        <p:cNvGrpSpPr/>
-        <p:nvPr/>
-      </p:nvGrpSpPr>
-      <p:grpSpPr>
-        <a:xfrm>
-          <a:off x="0" y="0"/>
-          <a:ext cx="0" cy="0"/>
-          <a:chOff x="0" y="0"/>
-          <a:chExt cx="0" cy="0"/>
-        </a:xfrm>
-      </p:grpSpPr>
-      <p:sp>
-        <p:nvSpPr>
-          <p:cNvPr id="2" name="Slide Image Placeholder 1"/>
-          <p:cNvSpPr>
-            <a:spLocks noGrp="1" noRot="1" noChangeAspect="1"/>
-          </p:cNvSpPr>
-          <p:nvPr>
-            <p:ph type="sldImg"/>
-          </p:nvPr>
-        </p:nvSpPr>
-        <p:spPr/>
-      </p:sp>
-      <p:sp>
-        <p:nvSpPr>
-          <p:cNvPr id="3" name="Notes Placeholder 2"/>
-          <p:cNvSpPr>
-            <a:spLocks noGrp="1"/>
-          </p:cNvSpPr>
-          <p:nvPr>
-            <p:ph type="body" idx="1"/>
-          </p:nvPr>
-        </p:nvSpPr>
-        <p:spPr/>
-        <p:txBody>
-          <a:bodyPr/>
-          <a:lstStyle/>
-          <a:p>
-            <a:pPr marL="0" marR="0">
-              <a:spcBef>
-                <a:spcPts val="0"/>
-              </a:spcBef>
-              <a:spcAft>
-                <a:spcPts val="0"/>
-              </a:spcAft>
-            </a:pPr>
-            <a:r>
-              <a:rPr lang="en-US" sz="1800" dirty="0">
-                <a:solidFill>
-                  <a:srgbClr val="374151"/>
-                </a:solidFill>
-                <a:effectLst/>
-                <a:latin typeface="Söhne"/>
-              </a:rPr>
-              <a:t>Hello, my name is Dmitrii Bessonov. Today I want to talk </a:t>
-            </a:r>
-            <a:r>
-              <a:rPr lang="en-US" sz="1800">
-                <a:solidFill>
-                  <a:srgbClr val="374151"/>
-                </a:solidFill>
-                <a:effectLst/>
-                <a:latin typeface="Söhne"/>
-              </a:rPr>
-              <a:t>about my skills </a:t>
-            </a:r>
-            <a:r>
-              <a:rPr lang="en-US" sz="1800" dirty="0">
-                <a:solidFill>
-                  <a:srgbClr val="374151"/>
-                </a:solidFill>
-                <a:effectLst/>
-                <a:latin typeface="Söhne"/>
-              </a:rPr>
-              <a:t>and experience as I apply for the Lead Software Engineer role. </a:t>
-            </a:r>
-          </a:p>
-          <a:p>
-            <a:pPr marL="0" marR="0">
-              <a:spcBef>
-                <a:spcPts val="0"/>
-              </a:spcBef>
-              <a:spcAft>
-                <a:spcPts val="0"/>
-              </a:spcAft>
-            </a:pPr>
-            <a:r>
-              <a:rPr lang="en-US" sz="1800" dirty="0">
-                <a:solidFill>
-                  <a:srgbClr val="374151"/>
-                </a:solidFill>
-                <a:effectLst/>
-                <a:latin typeface="Söhne"/>
-              </a:rPr>
-              <a:t>My core skills are .NET/C# and lots of technologies and tools related to this stack. </a:t>
-            </a:r>
-          </a:p>
-          <a:p>
-            <a:pPr marL="0" marR="0">
-              <a:spcBef>
-                <a:spcPts val="0"/>
-              </a:spcBef>
-              <a:spcAft>
-                <a:spcPts val="0"/>
-              </a:spcAft>
-            </a:pPr>
-            <a:r>
-              <a:rPr lang="en-US" sz="1800" dirty="0">
-                <a:solidFill>
-                  <a:srgbClr val="374151"/>
-                </a:solidFill>
-                <a:effectLst/>
-                <a:latin typeface="Calibri" panose="020F0502020204030204" pitchFamily="34" charset="0"/>
-              </a:rPr>
-              <a:t>My primary focus area is project success.</a:t>
-            </a:r>
-          </a:p>
-          <a:p>
-            <a:pPr marL="0" marR="0">
-              <a:spcBef>
-                <a:spcPts val="0"/>
-              </a:spcBef>
-              <a:spcAft>
-                <a:spcPts val="0"/>
-              </a:spcAft>
-            </a:pPr>
-            <a:r>
-              <a:rPr lang="en-US" sz="1800" dirty="0">
-                <a:solidFill>
-                  <a:srgbClr val="374151"/>
-                </a:solidFill>
-                <a:effectLst/>
-                <a:latin typeface="Calibri" panose="020F0502020204030204" pitchFamily="34" charset="0"/>
-              </a:rPr>
-              <a:t>In addition to my technical skills, I actively participate in mentoring, teaching students as a lector, conducting interviews, and participating in hackathons.</a:t>
-            </a:r>
-            <a:endParaRPr lang="en-US" dirty="0"/>
-          </a:p>
-        </p:txBody>
-      </p:sp>
-      <p:sp>
-        <p:nvSpPr>
-          <p:cNvPr id="4" name="Slide Number Placeholder 3"/>
-          <p:cNvSpPr>
-            <a:spLocks noGrp="1"/>
-          </p:cNvSpPr>
-          <p:nvPr>
-            <p:ph type="sldNum" sz="quarter" idx="5"/>
-          </p:nvPr>
-        </p:nvSpPr>
-        <p:spPr/>
-        <p:txBody>
-          <a:bodyPr/>
-          <a:lstStyle/>
-          <a:p>
-            <a:pPr marL="0" marR="0" lvl="0" indent="0" algn="r" defTabSz="685800" rtl="0" eaLnBrk="1" fontAlgn="auto" latinLnBrk="0" hangingPunct="1">
-              <a:lnSpc>
-                <a:spcPct val="100000"/>
-              </a:lnSpc>
-              <a:spcBef>
-                <a:spcPts val="0"/>
-              </a:spcBef>
-              <a:spcAft>
-                <a:spcPts val="0"/>
-              </a:spcAft>
-              <a:buClrTx/>
-              <a:buSzTx/>
-              <a:buFontTx/>
-              <a:buNone/>
-              <a:tabLst/>
-              <a:defRPr/>
-            </a:pPr>
-            <a:fld id="{A874FABB-6DBE-47C4-B626-20167906F475}" type="slidenum">
-              <a:rPr kumimoji="0" lang="en-US" sz="1200" b="0" i="0" u="none" strike="noStrike" kern="1200" cap="none" spc="0" normalizeH="0" baseline="0" noProof="0" smtClean="0">
-                <a:ln>
-                  <a:noFill/>
-                </a:ln>
-                <a:solidFill>
-                  <a:prstClr val="black"/>
-                </a:solidFill>
-                <a:effectLst/>
-                <a:uLnTx/>
-                <a:uFillTx/>
-                <a:latin typeface="Calibri" panose="020F0502020204030204"/>
-                <a:ea typeface="+mn-ea"/>
-                <a:cs typeface="+mn-cs"/>
-              </a:rPr>
-              <a:pPr marL="0" marR="0" lvl="0" indent="0" algn="r" defTabSz="685800" rtl="0" eaLnBrk="1" fontAlgn="auto" latinLnBrk="0" hangingPunct="1">
-                <a:lnSpc>
-                  <a:spcPct val="100000"/>
-                </a:lnSpc>
-                <a:spcBef>
-                  <a:spcPts val="0"/>
-                </a:spcBef>
-                <a:spcAft>
-                  <a:spcPts val="0"/>
-                </a:spcAft>
-                <a:buClrTx/>
-                <a:buSzTx/>
-                <a:buFontTx/>
-                <a:buNone/>
-                <a:tabLst/>
-                <a:defRPr/>
-              </a:pPr>
-              <a:t>2</a:t>
-            </a:fld>
-            <a:endParaRPr kumimoji="0" lang="en-US" sz="1200" b="0" i="0" u="none" strike="noStrike" kern="1200" cap="none" spc="0" normalizeH="0" baseline="0" noProof="0">
-              <a:ln>
-                <a:noFill/>
-              </a:ln>
-              <a:solidFill>
-                <a:prstClr val="black"/>
-              </a:solidFill>
-              <a:effectLst/>
-              <a:uLnTx/>
-              <a:uFillTx/>
-              <a:latin typeface="Calibri" panose="020F0502020204030204"/>
-              <a:ea typeface="+mn-ea"/>
-              <a:cs typeface="+mn-cs"/>
-            </a:endParaRPr>
-          </a:p>
-        </p:txBody>
-      </p:sp>
-    </p:spTree>
-    <p:extLst>
-      <p:ext uri="{BB962C8B-B14F-4D97-AF65-F5344CB8AC3E}">
-        <p14:creationId xmlns:p14="http://schemas.microsoft.com/office/powerpoint/2010/main" val="341698694"/>
-      </p:ext>
-    </p:extLst>
-  </p:cSld>
-  <p:clrMapOvr>
-    <a:masterClrMapping/>
-  </p:clrMapOvr>
-</p:notes>
 </file>
 
 <file path=ppt/slideLayouts/slideLayout1.xml><?xml version="1.0" encoding="utf-8"?>
@@ -15812,7 +15965,7 @@
           </a:ln>
           <a:extLst>
             <a:ext uri="{C572A759-6A51-4108-AA02-DFA0A04FC94B}">
-              <ma14:wrappingTextBoxFlag xmlns="" xmlns:ma14="http://schemas.microsoft.com/office/mac/drawingml/2011/main" val="1"/>
+              <ma14:wrappingTextBoxFlag xmlns:ma14="http://schemas.microsoft.com/office/mac/drawingml/2011/main" xmlns="" val="1"/>
             </a:ext>
           </a:extLst>
         </p:spPr>
@@ -34239,7 +34392,7 @@
           </a:ln>
           <a:extLst>
             <a:ext uri="{C572A759-6A51-4108-AA02-DFA0A04FC94B}">
-              <ma14:wrappingTextBoxFlag xmlns:ma14="http://schemas.microsoft.com/office/mac/drawingml/2011/main" xmlns="" val="1"/>
+              <ma14:wrappingTextBoxFlag xmlns="" xmlns:ma14="http://schemas.microsoft.com/office/mac/drawingml/2011/main" val="1"/>
             </a:ext>
           </a:extLst>
         </p:spPr>
@@ -47113,14 +47266,6 @@
 <file path=ppt/slides/slide2.xml><?xml version="1.0" encoding="utf-8"?>
 <p:sld xmlns:a="http://schemas.openxmlformats.org/drawingml/2006/main" xmlns:r="http://schemas.openxmlformats.org/officeDocument/2006/relationships" xmlns:p="http://schemas.openxmlformats.org/presentationml/2006/main">
   <p:cSld>
-    <p:bg>
-      <p:bgPr>
-        <a:solidFill>
-          <a:schemeClr val="bg1"/>
-        </a:solidFill>
-        <a:effectLst/>
-      </p:bgPr>
-    </p:bg>
     <p:spTree>
       <p:nvGrpSpPr>
         <p:cNvPr id="1" name=""/>
@@ -47137,30 +47282,338 @@
       </p:grpSpPr>
       <p:sp>
         <p:nvSpPr>
-          <p:cNvPr id="3" name="Content Placeholder 2"/>
+          <p:cNvPr id="12" name="Slide Number Placeholder 5">
+            <a:extLst>
+              <a:ext uri="{FF2B5EF4-FFF2-40B4-BE49-F238E27FC236}">
+                <a16:creationId xmlns:a16="http://schemas.microsoft.com/office/drawing/2014/main" id="{AA914C02-A0D5-DD26-BF6D-53E7F6D519ED}"/>
+              </a:ext>
+            </a:extLst>
+          </p:cNvPr>
           <p:cNvSpPr>
             <a:spLocks noGrp="1"/>
           </p:cNvSpPr>
           <p:nvPr>
-            <p:ph sz="quarter" idx="10"/>
+            <p:ph type="sldNum" sz="quarter" idx="4"/>
           </p:nvPr>
+        </p:nvSpPr>
+        <p:spPr/>
+        <p:txBody>
+          <a:bodyPr wrap="none" anchor="ctr">
+            <a:normAutofit/>
+          </a:bodyPr>
+          <a:lstStyle/>
+          <a:p>
+            <a:pPr>
+              <a:spcAft>
+                <a:spcPts val="600"/>
+              </a:spcAft>
+            </a:pPr>
+            <a:fld id="{3A707DD9-E92B-45E8-BE0A-E6B2EDF345EB}" type="slidenum">
+              <a:rPr lang="en-US" smtClean="0"/>
+              <a:pPr>
+                <a:spcAft>
+                  <a:spcPts val="600"/>
+                </a:spcAft>
+              </a:pPr>
+              <a:t>2</a:t>
+            </a:fld>
+            <a:endParaRPr lang="en-US"/>
+          </a:p>
+        </p:txBody>
+      </p:sp>
+      <p:sp>
+        <p:nvSpPr>
+          <p:cNvPr id="24" name="Title 1">
+            <a:extLst>
+              <a:ext uri="{FF2B5EF4-FFF2-40B4-BE49-F238E27FC236}">
+                <a16:creationId xmlns:a16="http://schemas.microsoft.com/office/drawing/2014/main" id="{DE1B32CC-E5FB-9A8D-08AD-80B29CD91C78}"/>
+              </a:ext>
+            </a:extLst>
+          </p:cNvPr>
+          <p:cNvSpPr txBox="1">
+            <a:spLocks/>
+          </p:cNvSpPr>
+          <p:nvPr/>
+        </p:nvSpPr>
+        <p:spPr>
+          <a:xfrm>
+            <a:off x="285757" y="235580"/>
+            <a:ext cx="8426450" cy="301625"/>
+          </a:xfrm>
+          <a:prstGeom prst="rect">
+            <a:avLst/>
+          </a:prstGeom>
+        </p:spPr>
+        <p:txBody>
+          <a:bodyPr vert="horz" wrap="none" lIns="0" tIns="45720" rIns="0" bIns="45720" rtlCol="0" anchor="ctr">
+            <a:noAutofit/>
+          </a:bodyPr>
+          <a:lstStyle>
+            <a:lvl1pPr algn="l" defTabSz="914400" rtl="0" eaLnBrk="1" latinLnBrk="0" hangingPunct="1">
+              <a:lnSpc>
+                <a:spcPct val="100000"/>
+              </a:lnSpc>
+              <a:spcBef>
+                <a:spcPct val="0"/>
+              </a:spcBef>
+              <a:buNone/>
+              <a:defRPr sz="2000" kern="1200" cap="none" spc="100" baseline="0">
+                <a:solidFill>
+                  <a:schemeClr val="tx1"/>
+                </a:solidFill>
+                <a:latin typeface="+mj-lt"/>
+                <a:ea typeface="+mj-ea"/>
+                <a:cs typeface="+mj-cs"/>
+              </a:defRPr>
+            </a:lvl1pPr>
+          </a:lstStyle>
+          <a:p>
+            <a:r>
+              <a:rPr lang="en-US" dirty="0"/>
+              <a:t>About me</a:t>
+            </a:r>
+          </a:p>
+        </p:txBody>
+      </p:sp>
+      <p:pic>
+        <p:nvPicPr>
+          <p:cNvPr id="30" name="Picture Placeholder 6" descr="A person smiling for the camera&#10;&#10;Description automatically generated">
+            <a:extLst>
+              <a:ext uri="{FF2B5EF4-FFF2-40B4-BE49-F238E27FC236}">
+                <a16:creationId xmlns:a16="http://schemas.microsoft.com/office/drawing/2014/main" id="{EC38ADEB-94D0-3208-9F36-9B175A08E953}"/>
+              </a:ext>
+            </a:extLst>
+          </p:cNvPr>
+          <p:cNvPicPr>
+            <a:picLocks noGrp="1" noChangeAspect="1"/>
+          </p:cNvPicPr>
+          <p:nvPr>
+            <p:ph type="pic" sz="quarter" idx="14"/>
+          </p:nvPr>
+        </p:nvPicPr>
+        <p:blipFill>
+          <a:blip r:embed="rId2">
+            <a:extLst>
+              <a:ext uri="{28A0092B-C50C-407E-A947-70E740481C1C}">
+                <a14:useLocalDpi xmlns:a14="http://schemas.microsoft.com/office/drawing/2010/main" val="0"/>
+              </a:ext>
+            </a:extLst>
+          </a:blip>
+          <a:srcRect/>
+          <a:stretch>
+            <a:fillRect/>
+          </a:stretch>
+        </p:blipFill>
+        <p:spPr>
+          <a:xfrm>
+            <a:off x="6406895" y="1581215"/>
+            <a:ext cx="1664208" cy="1664208"/>
+          </a:xfrm>
+        </p:spPr>
+      </p:pic>
+      <p:sp>
+        <p:nvSpPr>
+          <p:cNvPr id="36" name="Content Placeholder 2">
+            <a:extLst>
+              <a:ext uri="{FF2B5EF4-FFF2-40B4-BE49-F238E27FC236}">
+                <a16:creationId xmlns:a16="http://schemas.microsoft.com/office/drawing/2014/main" id="{C50D2F5E-5450-0B81-6C52-8617807A7790}"/>
+              </a:ext>
+            </a:extLst>
+          </p:cNvPr>
+          <p:cNvSpPr txBox="1">
+            <a:spLocks/>
+          </p:cNvSpPr>
+          <p:nvPr/>
         </p:nvSpPr>
         <p:spPr>
           <a:xfrm>
             <a:off x="285757" y="950374"/>
             <a:ext cx="3986211" cy="3422649"/>
           </a:xfrm>
+          <a:prstGeom prst="rect">
+            <a:avLst/>
+          </a:prstGeom>
         </p:spPr>
         <p:txBody>
           <a:bodyPr vert="horz" lIns="0" tIns="0" rIns="0" bIns="0" rtlCol="0" anchor="t">
             <a:noAutofit/>
           </a:bodyPr>
-          <a:lstStyle/>
+          <a:lstStyle>
+            <a:lvl1pPr marL="171450" marR="0" indent="-171450" algn="l" defTabSz="914400" rtl="0" eaLnBrk="1" fontAlgn="auto" latinLnBrk="0" hangingPunct="1">
+              <a:lnSpc>
+                <a:spcPts val="1600"/>
+              </a:lnSpc>
+              <a:spcBef>
+                <a:spcPts val="264"/>
+              </a:spcBef>
+              <a:spcAft>
+                <a:spcPts val="300"/>
+              </a:spcAft>
+              <a:buClrTx/>
+              <a:buSzTx/>
+              <a:buFont typeface="Arial" panose="020B0604020202020204" pitchFamily="34" charset="0"/>
+              <a:buChar char="•"/>
+              <a:tabLst/>
+              <a:defRPr sz="1100" kern="1200">
+                <a:solidFill>
+                  <a:schemeClr val="tx1"/>
+                </a:solidFill>
+                <a:latin typeface="+mj-lt"/>
+                <a:ea typeface="+mn-ea"/>
+                <a:cs typeface="+mn-cs"/>
+              </a:defRPr>
+            </a:lvl1pPr>
+            <a:lvl2pPr marL="628650" indent="-171450" algn="l" defTabSz="914400" rtl="0" eaLnBrk="1" latinLnBrk="0" hangingPunct="1">
+              <a:lnSpc>
+                <a:spcPct val="90000"/>
+              </a:lnSpc>
+              <a:spcBef>
+                <a:spcPts val="500"/>
+              </a:spcBef>
+              <a:buFont typeface="Arial" panose="020B0604020202020204" pitchFamily="34" charset="0"/>
+              <a:buChar char="•"/>
+              <a:defRPr sz="1100" kern="1200">
+                <a:solidFill>
+                  <a:schemeClr val="tx1"/>
+                </a:solidFill>
+                <a:latin typeface="+mn-lt"/>
+                <a:ea typeface="+mn-ea"/>
+                <a:cs typeface="+mn-cs"/>
+              </a:defRPr>
+            </a:lvl2pPr>
+            <a:lvl3pPr marL="1085850" indent="-171450" algn="l" defTabSz="914400" rtl="0" eaLnBrk="1" latinLnBrk="0" hangingPunct="1">
+              <a:lnSpc>
+                <a:spcPct val="90000"/>
+              </a:lnSpc>
+              <a:spcBef>
+                <a:spcPts val="500"/>
+              </a:spcBef>
+              <a:buFont typeface="Arial" panose="020B0604020202020204" pitchFamily="34" charset="0"/>
+              <a:buChar char="•"/>
+              <a:defRPr sz="1100" kern="1200">
+                <a:solidFill>
+                  <a:schemeClr val="tx1"/>
+                </a:solidFill>
+                <a:latin typeface="+mn-lt"/>
+                <a:ea typeface="+mn-ea"/>
+                <a:cs typeface="+mn-cs"/>
+              </a:defRPr>
+            </a:lvl3pPr>
+            <a:lvl4pPr marL="1657350" indent="-285750" algn="l" defTabSz="914400" rtl="0" eaLnBrk="1" latinLnBrk="0" hangingPunct="1">
+              <a:lnSpc>
+                <a:spcPct val="90000"/>
+              </a:lnSpc>
+              <a:spcBef>
+                <a:spcPts val="500"/>
+              </a:spcBef>
+              <a:buFont typeface="Arial" panose="020B0604020202020204" pitchFamily="34" charset="0"/>
+              <a:buChar char="•"/>
+              <a:defRPr sz="1100" kern="1200">
+                <a:solidFill>
+                  <a:schemeClr val="tx1"/>
+                </a:solidFill>
+                <a:latin typeface="+mn-lt"/>
+                <a:ea typeface="+mn-ea"/>
+                <a:cs typeface="+mn-cs"/>
+              </a:defRPr>
+            </a:lvl4pPr>
+            <a:lvl5pPr marL="1828800" indent="0" algn="l" defTabSz="914400" rtl="0" eaLnBrk="1" latinLnBrk="0" hangingPunct="1">
+              <a:lnSpc>
+                <a:spcPct val="90000"/>
+              </a:lnSpc>
+              <a:spcBef>
+                <a:spcPts val="500"/>
+              </a:spcBef>
+              <a:buFont typeface="Arial" panose="020B0604020202020204" pitchFamily="34" charset="0"/>
+              <a:buNone/>
+              <a:defRPr sz="1800" kern="1200">
+                <a:solidFill>
+                  <a:schemeClr val="tx1"/>
+                </a:solidFill>
+                <a:latin typeface="+mn-lt"/>
+                <a:ea typeface="+mn-ea"/>
+                <a:cs typeface="+mn-cs"/>
+              </a:defRPr>
+            </a:lvl5pPr>
+            <a:lvl6pPr marL="2514600" indent="-228600" algn="l" defTabSz="914400" rtl="0" eaLnBrk="1" latinLnBrk="0" hangingPunct="1">
+              <a:lnSpc>
+                <a:spcPct val="90000"/>
+              </a:lnSpc>
+              <a:spcBef>
+                <a:spcPts val="500"/>
+              </a:spcBef>
+              <a:buFont typeface="Arial" panose="020B0604020202020204" pitchFamily="34" charset="0"/>
+              <a:buChar char="•"/>
+              <a:defRPr sz="1800" kern="1200">
+                <a:solidFill>
+                  <a:schemeClr val="tx1"/>
+                </a:solidFill>
+                <a:latin typeface="+mn-lt"/>
+                <a:ea typeface="+mn-ea"/>
+                <a:cs typeface="+mn-cs"/>
+              </a:defRPr>
+            </a:lvl6pPr>
+            <a:lvl7pPr marL="2971800" indent="-228600" algn="l" defTabSz="914400" rtl="0" eaLnBrk="1" latinLnBrk="0" hangingPunct="1">
+              <a:lnSpc>
+                <a:spcPct val="90000"/>
+              </a:lnSpc>
+              <a:spcBef>
+                <a:spcPts val="500"/>
+              </a:spcBef>
+              <a:buFont typeface="Arial" panose="020B0604020202020204" pitchFamily="34" charset="0"/>
+              <a:buChar char="•"/>
+              <a:defRPr sz="1800" kern="1200">
+                <a:solidFill>
+                  <a:schemeClr val="tx1"/>
+                </a:solidFill>
+                <a:latin typeface="+mn-lt"/>
+                <a:ea typeface="+mn-ea"/>
+                <a:cs typeface="+mn-cs"/>
+              </a:defRPr>
+            </a:lvl7pPr>
+            <a:lvl8pPr marL="3429000" indent="-228600" algn="l" defTabSz="914400" rtl="0" eaLnBrk="1" latinLnBrk="0" hangingPunct="1">
+              <a:lnSpc>
+                <a:spcPct val="90000"/>
+              </a:lnSpc>
+              <a:spcBef>
+                <a:spcPts val="500"/>
+              </a:spcBef>
+              <a:buFont typeface="Arial" panose="020B0604020202020204" pitchFamily="34" charset="0"/>
+              <a:buChar char="•"/>
+              <a:defRPr sz="1800" kern="1200">
+                <a:solidFill>
+                  <a:schemeClr val="tx1"/>
+                </a:solidFill>
+                <a:latin typeface="+mn-lt"/>
+                <a:ea typeface="+mn-ea"/>
+                <a:cs typeface="+mn-cs"/>
+              </a:defRPr>
+            </a:lvl8pPr>
+            <a:lvl9pPr marL="3886200" indent="-228600" algn="l" defTabSz="914400" rtl="0" eaLnBrk="1" latinLnBrk="0" hangingPunct="1">
+              <a:lnSpc>
+                <a:spcPct val="90000"/>
+              </a:lnSpc>
+              <a:spcBef>
+                <a:spcPts val="500"/>
+              </a:spcBef>
+              <a:buFont typeface="Arial" panose="020B0604020202020204" pitchFamily="34" charset="0"/>
+              <a:buChar char="•"/>
+              <a:defRPr sz="1800" kern="1200">
+                <a:solidFill>
+                  <a:schemeClr val="tx1"/>
+                </a:solidFill>
+                <a:latin typeface="+mn-lt"/>
+                <a:ea typeface="+mn-ea"/>
+                <a:cs typeface="+mn-cs"/>
+              </a:defRPr>
+            </a:lvl9pPr>
+          </a:lstStyle>
           <a:p>
             <a:pPr marL="0" indent="0">
               <a:lnSpc>
                 <a:spcPct val="100000"/>
               </a:lnSpc>
+              <a:buFont typeface="Arial" panose="020B0604020202020204" pitchFamily="34" charset="0"/>
               <a:buNone/>
             </a:pPr>
             <a:r>
@@ -47184,6 +47637,7 @@
               <a:lnSpc>
                 <a:spcPct val="100000"/>
               </a:lnSpc>
+              <a:buFont typeface="Arial" panose="020B0604020202020204" pitchFamily="34" charset="0"/>
               <a:buNone/>
             </a:pPr>
             <a:r>
@@ -47252,6 +47706,7 @@
               <a:lnSpc>
                 <a:spcPct val="100000"/>
               </a:lnSpc>
+              <a:buFont typeface="Arial" panose="020B0604020202020204" pitchFamily="34" charset="0"/>
               <a:buNone/>
             </a:pPr>
             <a:r>
@@ -47281,6 +47736,7 @@
               <a:lnSpc>
                 <a:spcPct val="100000"/>
               </a:lnSpc>
+              <a:buFont typeface="Arial" panose="020B0604020202020204" pitchFamily="34" charset="0"/>
               <a:buNone/>
             </a:pPr>
             <a:endParaRPr lang="en-US" dirty="0"/>
@@ -47290,6 +47746,7 @@
               <a:lnSpc>
                 <a:spcPct val="100000"/>
               </a:lnSpc>
+              <a:buFont typeface="Arial" panose="020B0604020202020204" pitchFamily="34" charset="0"/>
               <a:buNone/>
             </a:pPr>
             <a:endParaRPr lang="en-US" dirty="0"/>
@@ -47298,10 +47755,220 @@
       </p:sp>
       <p:sp>
         <p:nvSpPr>
-          <p:cNvPr id="5" name="Text Placeholder 4">
+          <p:cNvPr id="38" name="Text Placeholder 8">
             <a:extLst>
               <a:ext uri="{FF2B5EF4-FFF2-40B4-BE49-F238E27FC236}">
-                <a16:creationId xmlns:a16="http://schemas.microsoft.com/office/drawing/2014/main" id="{EF19F599-9E5A-40A4-8AC5-6C97D1AA1592}"/>
+                <a16:creationId xmlns:a16="http://schemas.microsoft.com/office/drawing/2014/main" id="{50BB4227-7C8C-A15F-68B2-639B460DB7F1}"/>
+              </a:ext>
+            </a:extLst>
+          </p:cNvPr>
+          <p:cNvSpPr txBox="1">
+            <a:spLocks/>
+          </p:cNvSpPr>
+          <p:nvPr/>
+        </p:nvSpPr>
+        <p:spPr>
+          <a:xfrm>
+            <a:off x="0" y="618077"/>
+            <a:ext cx="5332837" cy="243510"/>
+          </a:xfrm>
+          <a:prstGeom prst="rect">
+            <a:avLst/>
+          </a:prstGeom>
+          <a:solidFill>
+            <a:srgbClr val="E5E2E7"/>
+          </a:solidFill>
+          <a:effectLst>
+            <a:reflection blurRad="6350" stA="52000" endA="300" endPos="35000" dir="5400000" sy="-100000" algn="bl" rotWithShape="0"/>
+          </a:effectLst>
+        </p:spPr>
+        <p:txBody>
+          <a:bodyPr vert="horz" wrap="none" lIns="0" tIns="0" rIns="0" bIns="0" rtlCol="0" anchor="t">
+            <a:noAutofit/>
+          </a:bodyPr>
+          <a:lstStyle>
+            <a:lvl1pPr marL="0" indent="0" algn="l" defTabSz="914400" rtl="0" eaLnBrk="1" latinLnBrk="0" hangingPunct="1">
+              <a:lnSpc>
+                <a:spcPts val="1600"/>
+              </a:lnSpc>
+              <a:spcBef>
+                <a:spcPts val="288"/>
+              </a:spcBef>
+              <a:spcAft>
+                <a:spcPts val="300"/>
+              </a:spcAft>
+              <a:buFont typeface="Arial" panose="020B0604020202020204" pitchFamily="34" charset="0"/>
+              <a:buNone/>
+              <a:defRPr sz="900" b="1" i="1" kern="1200" cap="none" spc="100" baseline="0">
+                <a:solidFill>
+                  <a:schemeClr val="tx1"/>
+                </a:solidFill>
+                <a:latin typeface="+mn-lt"/>
+                <a:ea typeface="+mn-ea"/>
+                <a:cs typeface="+mn-cs"/>
+              </a:defRPr>
+            </a:lvl1pPr>
+            <a:lvl2pPr marL="628650" indent="-171450" algn="l" defTabSz="914400" rtl="0" eaLnBrk="1" latinLnBrk="0" hangingPunct="1">
+              <a:lnSpc>
+                <a:spcPct val="90000"/>
+              </a:lnSpc>
+              <a:spcBef>
+                <a:spcPts val="500"/>
+              </a:spcBef>
+              <a:buFont typeface="Arial" panose="020B0604020202020204" pitchFamily="34" charset="0"/>
+              <a:buChar char="•"/>
+              <a:defRPr sz="1100" kern="1200">
+                <a:solidFill>
+                  <a:schemeClr val="tx1"/>
+                </a:solidFill>
+                <a:latin typeface="+mn-lt"/>
+                <a:ea typeface="+mn-ea"/>
+                <a:cs typeface="+mn-cs"/>
+              </a:defRPr>
+            </a:lvl2pPr>
+            <a:lvl3pPr marL="1085850" indent="-171450" algn="l" defTabSz="914400" rtl="0" eaLnBrk="1" latinLnBrk="0" hangingPunct="1">
+              <a:lnSpc>
+                <a:spcPct val="90000"/>
+              </a:lnSpc>
+              <a:spcBef>
+                <a:spcPts val="500"/>
+              </a:spcBef>
+              <a:buFont typeface="Arial" panose="020B0604020202020204" pitchFamily="34" charset="0"/>
+              <a:buChar char="•"/>
+              <a:defRPr sz="1100" kern="1200">
+                <a:solidFill>
+                  <a:schemeClr val="tx1"/>
+                </a:solidFill>
+                <a:latin typeface="+mn-lt"/>
+                <a:ea typeface="+mn-ea"/>
+                <a:cs typeface="+mn-cs"/>
+              </a:defRPr>
+            </a:lvl3pPr>
+            <a:lvl4pPr marL="1657350" indent="-285750" algn="l" defTabSz="914400" rtl="0" eaLnBrk="1" latinLnBrk="0" hangingPunct="1">
+              <a:lnSpc>
+                <a:spcPct val="90000"/>
+              </a:lnSpc>
+              <a:spcBef>
+                <a:spcPts val="500"/>
+              </a:spcBef>
+              <a:buFont typeface="Arial" panose="020B0604020202020204" pitchFamily="34" charset="0"/>
+              <a:buChar char="•"/>
+              <a:defRPr sz="1100" kern="1200">
+                <a:solidFill>
+                  <a:schemeClr val="tx1"/>
+                </a:solidFill>
+                <a:latin typeface="+mn-lt"/>
+                <a:ea typeface="+mn-ea"/>
+                <a:cs typeface="+mn-cs"/>
+              </a:defRPr>
+            </a:lvl4pPr>
+            <a:lvl5pPr marL="1828800" indent="0" algn="l" defTabSz="914400" rtl="0" eaLnBrk="1" latinLnBrk="0" hangingPunct="1">
+              <a:lnSpc>
+                <a:spcPct val="90000"/>
+              </a:lnSpc>
+              <a:spcBef>
+                <a:spcPts val="500"/>
+              </a:spcBef>
+              <a:buFont typeface="Arial" panose="020B0604020202020204" pitchFamily="34" charset="0"/>
+              <a:buNone/>
+              <a:defRPr sz="1800" kern="1200">
+                <a:solidFill>
+                  <a:schemeClr val="tx1"/>
+                </a:solidFill>
+                <a:latin typeface="+mn-lt"/>
+                <a:ea typeface="+mn-ea"/>
+                <a:cs typeface="+mn-cs"/>
+              </a:defRPr>
+            </a:lvl5pPr>
+            <a:lvl6pPr marL="2514600" indent="-228600" algn="l" defTabSz="914400" rtl="0" eaLnBrk="1" latinLnBrk="0" hangingPunct="1">
+              <a:lnSpc>
+                <a:spcPct val="90000"/>
+              </a:lnSpc>
+              <a:spcBef>
+                <a:spcPts val="500"/>
+              </a:spcBef>
+              <a:buFont typeface="Arial" panose="020B0604020202020204" pitchFamily="34" charset="0"/>
+              <a:buChar char="•"/>
+              <a:defRPr sz="1800" kern="1200">
+                <a:solidFill>
+                  <a:schemeClr val="tx1"/>
+                </a:solidFill>
+                <a:latin typeface="+mn-lt"/>
+                <a:ea typeface="+mn-ea"/>
+                <a:cs typeface="+mn-cs"/>
+              </a:defRPr>
+            </a:lvl6pPr>
+            <a:lvl7pPr marL="2971800" indent="-228600" algn="l" defTabSz="914400" rtl="0" eaLnBrk="1" latinLnBrk="0" hangingPunct="1">
+              <a:lnSpc>
+                <a:spcPct val="90000"/>
+              </a:lnSpc>
+              <a:spcBef>
+                <a:spcPts val="500"/>
+              </a:spcBef>
+              <a:buFont typeface="Arial" panose="020B0604020202020204" pitchFamily="34" charset="0"/>
+              <a:buChar char="•"/>
+              <a:defRPr sz="1800" kern="1200">
+                <a:solidFill>
+                  <a:schemeClr val="tx1"/>
+                </a:solidFill>
+                <a:latin typeface="+mn-lt"/>
+                <a:ea typeface="+mn-ea"/>
+                <a:cs typeface="+mn-cs"/>
+              </a:defRPr>
+            </a:lvl7pPr>
+            <a:lvl8pPr marL="3429000" indent="-228600" algn="l" defTabSz="914400" rtl="0" eaLnBrk="1" latinLnBrk="0" hangingPunct="1">
+              <a:lnSpc>
+                <a:spcPct val="90000"/>
+              </a:lnSpc>
+              <a:spcBef>
+                <a:spcPts val="500"/>
+              </a:spcBef>
+              <a:buFont typeface="Arial" panose="020B0604020202020204" pitchFamily="34" charset="0"/>
+              <a:buChar char="•"/>
+              <a:defRPr sz="1800" kern="1200">
+                <a:solidFill>
+                  <a:schemeClr val="tx1"/>
+                </a:solidFill>
+                <a:latin typeface="+mn-lt"/>
+                <a:ea typeface="+mn-ea"/>
+                <a:cs typeface="+mn-cs"/>
+              </a:defRPr>
+            </a:lvl8pPr>
+            <a:lvl9pPr marL="3886200" indent="-228600" algn="l" defTabSz="914400" rtl="0" eaLnBrk="1" latinLnBrk="0" hangingPunct="1">
+              <a:lnSpc>
+                <a:spcPct val="90000"/>
+              </a:lnSpc>
+              <a:spcBef>
+                <a:spcPts val="500"/>
+              </a:spcBef>
+              <a:buFont typeface="Arial" panose="020B0604020202020204" pitchFamily="34" charset="0"/>
+              <a:buChar char="•"/>
+              <a:defRPr sz="1800" kern="1200">
+                <a:solidFill>
+                  <a:schemeClr val="tx1"/>
+                </a:solidFill>
+                <a:latin typeface="+mn-lt"/>
+                <a:ea typeface="+mn-ea"/>
+                <a:cs typeface="+mn-cs"/>
+              </a:defRPr>
+            </a:lvl9pPr>
+          </a:lstStyle>
+          <a:p>
+            <a:r>
+              <a:rPr lang="en-US" sz="1050" i="0" cap="small" dirty="0">
+                <a:latin typeface="+mj-lt"/>
+              </a:rPr>
+              <a:t>       Lead Software Engineer with 7 years of experience</a:t>
+            </a:r>
+          </a:p>
+        </p:txBody>
+      </p:sp>
+      <p:sp>
+        <p:nvSpPr>
+          <p:cNvPr id="40" name="Text Placeholder 4">
+            <a:extLst>
+              <a:ext uri="{FF2B5EF4-FFF2-40B4-BE49-F238E27FC236}">
+                <a16:creationId xmlns:a16="http://schemas.microsoft.com/office/drawing/2014/main" id="{79E49B00-AC74-D598-8910-CE5F11563EA3}"/>
               </a:ext>
             </a:extLst>
           </p:cNvPr>
@@ -47339,111 +48006,10 @@
           </a:p>
         </p:txBody>
       </p:sp>
-      <p:sp>
-        <p:nvSpPr>
-          <p:cNvPr id="2" name="Title 1"/>
-          <p:cNvSpPr>
-            <a:spLocks noGrp="1"/>
-          </p:cNvSpPr>
-          <p:nvPr>
-            <p:ph type="title" idx="4294967295"/>
-          </p:nvPr>
-        </p:nvSpPr>
-        <p:spPr>
-          <a:xfrm>
-            <a:off x="285757" y="235580"/>
-            <a:ext cx="8426450" cy="301625"/>
-          </a:xfrm>
-        </p:spPr>
-        <p:txBody>
-          <a:bodyPr/>
-          <a:lstStyle/>
-          <a:p>
-            <a:r>
-              <a:rPr lang="en-US" dirty="0"/>
-              <a:t>About me</a:t>
-            </a:r>
-          </a:p>
-        </p:txBody>
-      </p:sp>
-      <p:sp>
-        <p:nvSpPr>
-          <p:cNvPr id="9" name="Text Placeholder 8">
-            <a:extLst>
-              <a:ext uri="{FF2B5EF4-FFF2-40B4-BE49-F238E27FC236}">
-                <a16:creationId xmlns:a16="http://schemas.microsoft.com/office/drawing/2014/main" id="{35C07124-C3BC-4B02-8FA1-6FDB80709C39}"/>
-              </a:ext>
-            </a:extLst>
-          </p:cNvPr>
-          <p:cNvSpPr>
-            <a:spLocks noGrp="1"/>
-          </p:cNvSpPr>
-          <p:nvPr>
-            <p:ph type="body" sz="quarter" idx="15"/>
-          </p:nvPr>
-        </p:nvSpPr>
-        <p:spPr>
-          <a:xfrm>
-            <a:off x="0" y="618077"/>
-            <a:ext cx="5332837" cy="243510"/>
-          </a:xfrm>
-          <a:solidFill>
-            <a:srgbClr val="E5E2E7"/>
-          </a:solidFill>
-          <a:effectLst>
-            <a:reflection blurRad="6350" stA="52000" endA="300" endPos="35000" dir="5400000" sy="-100000" algn="bl" rotWithShape="0"/>
-          </a:effectLst>
-        </p:spPr>
-        <p:txBody>
-          <a:bodyPr vert="horz" wrap="none" lIns="0" tIns="0" rIns="0" bIns="0" rtlCol="0" anchor="t">
-            <a:noAutofit/>
-          </a:bodyPr>
-          <a:lstStyle/>
-          <a:p>
-            <a:r>
-              <a:rPr lang="en-US" sz="1050" i="0" cap="small" dirty="0">
-                <a:latin typeface="+mj-lt"/>
-              </a:rPr>
-              <a:t>       Lead Software Engineer with 7 years of experience</a:t>
-            </a:r>
-          </a:p>
-        </p:txBody>
-      </p:sp>
-      <p:pic>
-        <p:nvPicPr>
-          <p:cNvPr id="7" name="Picture Placeholder 6" descr="A person smiling for the camera&#10;&#10;Description automatically generated">
-            <a:extLst>
-              <a:ext uri="{FF2B5EF4-FFF2-40B4-BE49-F238E27FC236}">
-                <a16:creationId xmlns:a16="http://schemas.microsoft.com/office/drawing/2014/main" id="{73FC24BC-B845-4000-A004-2D39FC2A6077}"/>
-              </a:ext>
-            </a:extLst>
-          </p:cNvPr>
-          <p:cNvPicPr>
-            <a:picLocks noGrp="1" noChangeAspect="1"/>
-          </p:cNvPicPr>
-          <p:nvPr>
-            <p:ph type="pic" sz="quarter" idx="14"/>
-          </p:nvPr>
-        </p:nvPicPr>
-        <p:blipFill>
-          <a:blip r:embed="rId3">
-            <a:extLst>
-              <a:ext uri="{28A0092B-C50C-407E-A947-70E740481C1C}">
-                <a14:useLocalDpi xmlns:a14="http://schemas.microsoft.com/office/drawing/2010/main" val="0"/>
-              </a:ext>
-            </a:extLst>
-          </a:blip>
-          <a:srcRect/>
-          <a:stretch>
-            <a:fillRect/>
-          </a:stretch>
-        </p:blipFill>
-        <p:spPr/>
-      </p:pic>
     </p:spTree>
     <p:extLst>
       <p:ext uri="{BB962C8B-B14F-4D97-AF65-F5344CB8AC3E}">
-        <p14:creationId xmlns:p14="http://schemas.microsoft.com/office/powerpoint/2010/main" val="3015562108"/>
+        <p14:creationId xmlns:p14="http://schemas.microsoft.com/office/powerpoint/2010/main" val="3711491439"/>
       </p:ext>
     </p:extLst>
   </p:cSld>
@@ -47458,7 +48024,13 @@
   <p:cSld>
     <p:spTree>
       <p:nvGrpSpPr>
-        <p:cNvPr id="1" name=""/>
+        <p:cNvPr id="1" name="">
+          <a:extLst>
+            <a:ext uri="{FF2B5EF4-FFF2-40B4-BE49-F238E27FC236}">
+              <a16:creationId xmlns:a16="http://schemas.microsoft.com/office/drawing/2014/main" id="{3F772230-1A5F-B85A-546B-1FE288D1A157}"/>
+            </a:ext>
+          </a:extLst>
+        </p:cNvPr>
         <p:cNvGrpSpPr/>
         <p:nvPr/>
       </p:nvGrpSpPr>
@@ -47472,7 +48044,13 @@
       </p:grpSpPr>
       <p:sp>
         <p:nvSpPr>
-          <p:cNvPr id="2" name="Title 1"/>
+          <p:cNvPr id="2" name="Title 1">
+            <a:extLst>
+              <a:ext uri="{FF2B5EF4-FFF2-40B4-BE49-F238E27FC236}">
+                <a16:creationId xmlns:a16="http://schemas.microsoft.com/office/drawing/2014/main" id="{8C9B221A-B59F-27C0-98C6-768A0185CBE9}"/>
+              </a:ext>
+            </a:extLst>
+          </p:cNvPr>
           <p:cNvSpPr>
             <a:spLocks noGrp="1"/>
           </p:cNvSpPr>
@@ -47506,7 +48084,13 @@
       </p:sp>
       <p:sp>
         <p:nvSpPr>
-          <p:cNvPr id="3" name="Content Placeholder 2"/>
+          <p:cNvPr id="3" name="Content Placeholder 2">
+            <a:extLst>
+              <a:ext uri="{FF2B5EF4-FFF2-40B4-BE49-F238E27FC236}">
+                <a16:creationId xmlns:a16="http://schemas.microsoft.com/office/drawing/2014/main" id="{98D051F2-08D0-CB4D-5A45-2E47F30CC72C}"/>
+              </a:ext>
+            </a:extLst>
+          </p:cNvPr>
           <p:cNvSpPr>
             <a:spLocks noGrp="1"/>
           </p:cNvSpPr>
@@ -47550,7 +48134,7 @@
           <p:cNvPr id="7" name="Content Placeholder 6">
             <a:extLst>
               <a:ext uri="{FF2B5EF4-FFF2-40B4-BE49-F238E27FC236}">
-                <a16:creationId xmlns:a16="http://schemas.microsoft.com/office/drawing/2014/main" id="{9786D606-5187-FF80-DBDE-35D91C317CE8}"/>
+                <a16:creationId xmlns:a16="http://schemas.microsoft.com/office/drawing/2014/main" id="{B1728024-1E43-8B7C-B1AA-C10E8F2569A2}"/>
               </a:ext>
             </a:extLst>
           </p:cNvPr>
@@ -47578,7 +48162,7 @@
           <p:cNvPr id="10" name="Text Placeholder 4">
             <a:extLst>
               <a:ext uri="{FF2B5EF4-FFF2-40B4-BE49-F238E27FC236}">
-                <a16:creationId xmlns:a16="http://schemas.microsoft.com/office/drawing/2014/main" id="{7DF63890-7A27-62FC-0F61-14AE1AD9DC34}"/>
+                <a16:creationId xmlns:a16="http://schemas.microsoft.com/office/drawing/2014/main" id="{5846CBB4-B1C0-305D-8F65-A3D98115DC4F}"/>
               </a:ext>
             </a:extLst>
           </p:cNvPr>
@@ -47613,7 +48197,7 @@
           <p:cNvPr id="12" name="Slide Number Placeholder 5">
             <a:extLst>
               <a:ext uri="{FF2B5EF4-FFF2-40B4-BE49-F238E27FC236}">
-                <a16:creationId xmlns:a16="http://schemas.microsoft.com/office/drawing/2014/main" id="{AA914C02-A0D5-DD26-BF6D-53E7F6D519ED}"/>
+                <a16:creationId xmlns:a16="http://schemas.microsoft.com/office/drawing/2014/main" id="{BF7F0BB2-72B9-EF9C-D5EB-577CB48C537F}"/>
               </a:ext>
             </a:extLst>
           </p:cNvPr>
@@ -47657,7 +48241,7 @@
     </p:spTree>
     <p:extLst>
       <p:ext uri="{BB962C8B-B14F-4D97-AF65-F5344CB8AC3E}">
-        <p14:creationId xmlns:p14="http://schemas.microsoft.com/office/powerpoint/2010/main" val="3711491439"/>
+        <p14:creationId xmlns:p14="http://schemas.microsoft.com/office/powerpoint/2010/main" val="37949583"/>
       </p:ext>
     </p:extLst>
   </p:cSld>
@@ -50220,14 +50804,257 @@
 
 <file path=customXml/item1.xml><?xml version="1.0" encoding="utf-8"?>
 <?mso-contentType ?>
-<FormTemplates xmlns="http://schemas.microsoft.com/sharepoint/v3/contenttype/forms">
-  <Display>DocumentLibraryForm</Display>
-  <Edit>DocumentLibraryForm</Edit>
-  <New>DocumentLibraryForm</New>
-</FormTemplates>
+<spe:Receivers xmlns:spe="http://schemas.microsoft.com/sharepoint/events">
+  <Receiver>
+    <Name>Document ID Generator</Name>
+    <Synchronization>Synchronous</Synchronization>
+    <Type>10001</Type>
+    <SequenceNumber>1000</SequenceNumber>
+    <Url/>
+    <Assembly>Microsoft.Office.DocumentManagement, Version=16.0.0.0, Culture=neutral, PublicKeyToken=71e9bce111e9429c</Assembly>
+    <Class>Microsoft.Office.DocumentManagement.Internal.DocIdHandler</Class>
+    <Data/>
+    <Filter/>
+  </Receiver>
+  <Receiver>
+    <Name>Document ID Generator</Name>
+    <Synchronization>Synchronous</Synchronization>
+    <Type>10002</Type>
+    <SequenceNumber>1001</SequenceNumber>
+    <Url/>
+    <Assembly>Microsoft.Office.DocumentManagement, Version=16.0.0.0, Culture=neutral, PublicKeyToken=71e9bce111e9429c</Assembly>
+    <Class>Microsoft.Office.DocumentManagement.Internal.DocIdHandler</Class>
+    <Data/>
+    <Filter/>
+  </Receiver>
+  <Receiver>
+    <Name>Document ID Generator</Name>
+    <Synchronization>Synchronous</Synchronization>
+    <Type>10004</Type>
+    <SequenceNumber>1002</SequenceNumber>
+    <Url/>
+    <Assembly>Microsoft.Office.DocumentManagement, Version=16.0.0.0, Culture=neutral, PublicKeyToken=71e9bce111e9429c</Assembly>
+    <Class>Microsoft.Office.DocumentManagement.Internal.DocIdHandler</Class>
+    <Data/>
+    <Filter/>
+  </Receiver>
+  <Receiver>
+    <Name>Document ID Generator</Name>
+    <Synchronization>Synchronous</Synchronization>
+    <Type>10006</Type>
+    <SequenceNumber>1003</SequenceNumber>
+    <Url/>
+    <Assembly>Microsoft.Office.DocumentManagement, Version=16.0.0.0, Culture=neutral, PublicKeyToken=71e9bce111e9429c</Assembly>
+    <Class>Microsoft.Office.DocumentManagement.Internal.DocIdHandler</Class>
+    <Data/>
+    <Filter/>
+  </Receiver>
+</spe:Receivers>
 </file>
 
 <file path=customXml/item2.xml><?xml version="1.0" encoding="utf-8"?>
+<p:properties xmlns:p="http://schemas.microsoft.com/office/2006/metadata/properties" xmlns:xsi="http://www.w3.org/2001/XMLSchema-instance" xmlns:pc="http://schemas.microsoft.com/office/infopath/2007/PartnerControls">
+  <documentManagement>
+    <_dlc_DocIdPersistId xmlns="2f73596d-a490-4938-9ae7-6f2abd4edc7d" xsi:nil="true"/>
+    <_dlc_DocIdUrl xmlns="2f73596d-a490-4938-9ae7-6f2abd4edc7d">
+      <Url>https://epam.sharepoint.com/sites/policy/_layouts/15/DocIdRedir.aspx?ID=EPAM-1788376749-106</Url>
+      <Description>EPAM-1788376749-106</Description>
+    </_dlc_DocIdUrl>
+    <_dlc_DocId xmlns="2f73596d-a490-4938-9ae7-6f2abd4edc7d">EPAM-1788376749-106</_dlc_DocId>
+    <Company xmlns="http://schemas.microsoft.com/sharepoint/v3" xsi:nil="true"/>
+    <DocumentArea xmlns="a17c10a8-bd22-4f4b-9c5c-c3dc02494c46">
+      <Value>Maintenance and Support</Value>
+    </DocumentArea>
+    <Subarea xmlns="a17c10a8-bd22-4f4b-9c5c-c3dc02494c46">###</Subarea>
+    <Document_x0020_Approver_x0020__x0028_position_x0029_ xmlns="a17c10a8-bd22-4f4b-9c5c-c3dc02494c46">Senior Director, Delivery Management Office</Document_x0020_Approver_x0020__x0028_position_x0029_>
+    <Document_x0020_Owner_x0020__x0028_position_x0029_ xmlns="a17c10a8-bd22-4f4b-9c5c-c3dc02494c46">Head of Global Delivery</Document_x0020_Owner_x0020__x0028_position_x0029_>
+    <EPAMDocumentID_x0020_ xmlns="a17c10a8-bd22-4f4b-9c5c-c3dc02494c46">EPAM_Template-1203</EPAMDocumentID_x0020_>
+    <TemplatesTextContent xmlns="a17c10a8-bd22-4f4b-9c5c-c3dc02494c46">IT SERVICES MONTHLY REVIEW 
+Reported period : &lt;month, year &gt;
+CONFIDENTIAL  |  
+© 
+2024
+ EPAM Systems, Inc.
+IT SERVICE HEALTH : SERVICE VOLUME
+&lt;Diagram with all user’s and monitoring  incidents during reported period ; including count of incidents and resolver assignment group&gt;
+IT SERVICE HEALTH : SERVICE VOLUME
+&lt;Diagram with all service requests during reported period, should include numbers of all INC and SRs tickets during this period.​
+Business meaning:​
+These numbers represent unique tasks that came to each team and required attention and effort.​
+Proposed actions / decisions:​
+Analyzing volume trends correlating with major events;​
+Volume spikes after major events may indicate the need for further research of systemic root causes. &gt;
+3
+Tower (top10)
+Created INC/SR during &lt;repot period&gt;
+Created INC/SR during &lt;repot period&gt;
+Trend
+&lt;Assignment group&gt;
+&lt;number or INC/SR&gt;
+&lt;number or INC/SR&gt;
+&lt;increase / decrease &gt;
+&lt;Assignment group&gt;
+&lt;number or INC/SR&gt;
+&lt;number or INC/SR&gt;
+IT SERVICE HEALTH: &lt;Project&gt; SERVICE VOLUME
+&lt;Diagram with all user’s and monitoring  incidents during reported period for a specific project (not including services covered  by client); including count of incidents and resolver assignment group
+4
+Business meaning:​
+These numbers represent unique tasks that came to each team and required attention and effort.​
+Proposed actions / decisions:​
+Analyzing volume trends correlating with major events;​
+Volume spikes after major events may indicate the need for further research of systemic root causes. &gt;
+IT SERVICE HEALTH: &lt;Project&gt; SERVICE VOLUME
+&lt;Diagram with ALL service requests (opened, resolved, closed) related  to a specific project &gt;
+Business meaning:​
+These numbers represent unique tasks that came to each team and required attention and effort.​
+Proposed actions / decisions:​
+Analyzing volume trends correlating with major events;​
+The number of increased/decreased tickers should be specified, and possible action items proposed.
+5
+6
+IT SERVICE HEALTH: &lt;Project/Team&gt; Incidents’ SLAs
+&lt;Examples&gt;
+Business meaning:​
+This stats will show whether Response and Resolution SLA are within SLA
+.​
+Proposed actions / decisions:​
+Analyzing SLA breaching
+Keep SLAs calibration and monitoring 
+SLA targets:
+&lt;Specify SLA targets for different priority levels &gt;
+&lt;Diagram with Average time for processing different types of priority levels incidents, should contain Average time for processing P1-P4 Incidents &gt;
+7
+IT SERVICE HEALTH: &lt;Project/team&gt; Incidents’ SLAs
+Business meaning:​
+This stats will show whether Response and Resolution SLA are within SLA for different priority levels
+Proposed actions / decisions:​
+Analyzing SLA breaching 
+Keep SLAs calibration and monitoring
+SLA targets:
+P1 &lt;should be specified for each one&gt;
+P2
+P3
+P4
+IT SERVICE HEALTH: &lt;Team/Project&gt; INCs’ and SRs’ SLA 
+8
+&lt;insert the following diagrams/ statistics charts:
+Average processing time for Service Requests, Resolution time for Service requests, Ticket resolution quality 
+Reassignment Compliance&gt;
+Business meaning:​
+This stats will show whether Average processing time of Service Requests is healthy; Reassignment Compliance and Ticket resolution quality (number of reopen)
+Proposed actions / decisions:​
+Analyzing service volume and propose action items if required
+IT SERVICE HEALTH: P0/P1 INCIDENTS
+&lt;Diagram with closed P0/P1 incidents grouped by resolver group&gt;
+P0/P1ticket
+SLA Breached
+Team
+Short Description
+RCA
+Prevention/Mitigation
+9
+Business meaning:​
+These numbers show how many tickets of different Priority are resolved by each group and may provide better understanding of the complexity of incidents,
+Actions / decisions:​
+Analyzing &lt;Analyzing trends may drive DEV effort prioritization of “code improvements” vs “feature development&gt;  &lt;stability of Code , structure , code&gt;
+IT SERVICE HEALTH: TICKET AGE
+&lt;Diagram with all open incidents grouped by Backlog time and diagram with all open incidents grouped by Backlog time and priority: grouped by the following statuses : New, In Progress, On Hold &gt;
+Tower (top 10)
+Age (1+ month)
+10
+Business meaning:​
+Displays the number of days tickets have been open in the system. &lt;open tasks, backlog&gt;
+Actions / decisions:​
+&lt;for future Problem Management &gt;
+IT SERVICE Customer Satisfaction (CSAT)
+&lt;Diagram with statistics and trend line&gt;
+11
+Business meaning:​
+Customer satisfaction and score that indicates how satisfied a customer is with a specific product, transaction, or interaction with a company
+Actions / decisions:​
+Regular monthly CSAT Review 
+SERVICE TOWER: SERVICE DESK
+&lt;only if required &gt;
+Service Volume
+&lt;D
+iagram with total number of Tickets created in ITSM tool vs Tickets accepted by L1 vs First Level resolution (FLR) tickets
+Service SLAs
+&lt;
+Service Desk first call resolution rate of  level 1Support (True/ falls)
+Response SLA for L1 team (True/ falls)
+Tickets Age
+&lt;diagram  with all Open INC+ SR grouped by Backlog time and State (Pending, Open, Work in progress) for L1 Team&gt;
+12
+Key Highlights 
+&lt;specify for reported period &gt;
+Critical issues 
+&lt;specify for reported period &gt;
+SLA target
+&lt;specify for reported period &gt;
+SERVICE TOWER: CHANGE MANAGEMENT 
+&lt;Diagram with all changes groups by statuses which are in ITSM tool&gt;
+13
+Business meaning 
+The number of RFCs
+Actions / decisions:​
+SERVICE TOWER :PROBLEM MANAGEMENT
+&lt;Diagram with all problems groups by statuses which are in ITSM tool&gt;
+14
+Business meaning 
+These numbers may provide better understanding of the complexity of incidents, stability of Code, and overall health of environment 
+Actions / decisions:​
+RISKS
+&lt;Mention all possible risks grouped by a separate tower of service (Service Desk, Change / INC/Problem Management , Different teams within the project )&gt;
+15
+Risks
+Risk Owner
+Impact 
+Description/Impact
+Mitigation
+IT SERVICE IMPROVEMENTS (CSIP)
+Short Description 
+Owner
+Impact
+Date
+16
+Completed This Month
+Planned Next Month 
+Short Description 
+Owner
+Impact
+Date
+THANK YOU!
+17
+</TemplatesTextContent>
+    <SubjectDoc xmlns="a17c10a8-bd22-4f4b-9c5c-c3dc02494c46">Template</SubjectDoc>
+    <FriendlyURL xmlns="a17c10a8-bd22-4f4b-9c5c-c3dc02494c46">files/templates-examples/global-delivery/monthly-review-report.pptx</FriendlyURL>
+    <BriefDescription xmlns="a17c10a8-bd22-4f4b-9c5c-c3dc02494c46">This template is related to Maintenance and Support Guideline and intended to be used for monthly status reporting of maintenance and support project.</BriefDescription>
+    <WorkStorage xmlns="a17c10a8-bd22-4f4b-9c5c-c3dc02494c46">
+      <Url>https://epam.sharepoint.com/sites/policy/work/Shared%20Documents/Work%20Product%20Templates/Continuous%20delivery/Maintenance%20and%20Support</Url>
+      <Description>/sites/policy/work/Shared Documents/Work Product Templates/Continuous delivery/Maintenance and Support</Description>
+    </WorkStorage>
+    <PageName xmlns="a17c10a8-bd22-4f4b-9c5c-c3dc02494c46">
+      <Url>https://policy.epam.com/pages/templates-examples/monthly-review-report</Url>
+      <Description>Template: Monthly Review Report</Description>
+    </PageName>
+    <OrganizationalUnit xmlns="a17c10a8-bd22-4f4b-9c5c-c3dc02494c46">
+      <Url>https://people.epam.com/network/1/8aec5375-fd5e-4dd5-aa02-b9d225a43413/structure</Url>
+      <Description>Delivery Management Office</Description>
+    </OrganizationalUnit>
+    <LocationCountry xmlns="a17c10a8-bd22-4f4b-9c5c-c3dc02494c46">
+      <Value>Global</Value>
+    </LocationCountry>
+    <LastApprovalDate xmlns="a17c10a8-bd22-4f4b-9c5c-c3dc02494c46">2022-12-20T21:00:00+00:00</LastApprovalDate>
+    <LastApproverName xmlns="a17c10a8-bd22-4f4b-9c5c-c3dc02494c46">Dmitry Makeev</LastApproverName>
+    <Standards xmlns="a17c10a8-bd22-4f4b-9c5c-c3dc02494c46">
+      <Value>###</Value>
+    </Standards>
+  </documentManagement>
+</p:properties>
+</file>
+
+<file path=customXml/item3.xml><?xml version="1.0" encoding="utf-8"?>
 <ct:contentTypeSchema xmlns:ct="http://schemas.microsoft.com/office/2006/metadata/contentType" xmlns:ma="http://schemas.microsoft.com/office/2006/metadata/properties/metaAttributes" ct:_="" ma:_="" ma:contentTypeName="EPAM Template" ma:contentTypeID="0x0101006F5799D5350E4747858630C5700DFDF00046CFA168D8AB1B4D937A734D2015792B" ma:contentTypeVersion="4" ma:contentTypeDescription="ECL EPAM Template CT" ma:contentTypeScope="" ma:versionID="3e46c49967fe6bc1ef07a9a4e4763266">
   <xsd:schema xmlns:xsd="http://www.w3.org/2001/XMLSchema" xmlns:xs="http://www.w3.org/2001/XMLSchema" xmlns:p="http://schemas.microsoft.com/office/2006/metadata/properties" xmlns:ns1="http://schemas.microsoft.com/sharepoint/v3" xmlns:ns2="a17c10a8-bd22-4f4b-9c5c-c3dc02494c46" xmlns:ns4="2f73596d-a490-4938-9ae7-6f2abd4edc7d" targetNamespace="http://schemas.microsoft.com/office/2006/metadata/properties" ma:root="true" ma:fieldsID="8dbb4452feda95d41a68f55f9310cbf0" ns1:_="" ns2:_="" ns4:_="">
     <xsd:import namespace="http://schemas.microsoft.com/sharepoint/v3"/>
@@ -50715,287 +51542,24 @@
 </ct:contentTypeSchema>
 </file>
 
-<file path=customXml/item3.xml><?xml version="1.0" encoding="utf-8"?>
-<p:properties xmlns:p="http://schemas.microsoft.com/office/2006/metadata/properties" xmlns:xsi="http://www.w3.org/2001/XMLSchema-instance" xmlns:pc="http://schemas.microsoft.com/office/infopath/2007/PartnerControls">
-  <documentManagement>
-    <_dlc_DocIdPersistId xmlns="2f73596d-a490-4938-9ae7-6f2abd4edc7d" xsi:nil="true"/>
-    <_dlc_DocIdUrl xmlns="2f73596d-a490-4938-9ae7-6f2abd4edc7d">
-      <Url>https://epam.sharepoint.com/sites/policy/_layouts/15/DocIdRedir.aspx?ID=EPAM-1788376749-106</Url>
-      <Description>EPAM-1788376749-106</Description>
-    </_dlc_DocIdUrl>
-    <_dlc_DocId xmlns="2f73596d-a490-4938-9ae7-6f2abd4edc7d">EPAM-1788376749-106</_dlc_DocId>
-    <Company xmlns="http://schemas.microsoft.com/sharepoint/v3" xsi:nil="true"/>
-    <DocumentArea xmlns="a17c10a8-bd22-4f4b-9c5c-c3dc02494c46">
-      <Value>Maintenance and Support</Value>
-    </DocumentArea>
-    <Subarea xmlns="a17c10a8-bd22-4f4b-9c5c-c3dc02494c46">###</Subarea>
-    <Document_x0020_Approver_x0020__x0028_position_x0029_ xmlns="a17c10a8-bd22-4f4b-9c5c-c3dc02494c46">Senior Director, Delivery Management Office</Document_x0020_Approver_x0020__x0028_position_x0029_>
-    <Document_x0020_Owner_x0020__x0028_position_x0029_ xmlns="a17c10a8-bd22-4f4b-9c5c-c3dc02494c46">Head of Global Delivery</Document_x0020_Owner_x0020__x0028_position_x0029_>
-    <EPAMDocumentID_x0020_ xmlns="a17c10a8-bd22-4f4b-9c5c-c3dc02494c46">EPAM_Template-1203</EPAMDocumentID_x0020_>
-    <TemplatesTextContent xmlns="a17c10a8-bd22-4f4b-9c5c-c3dc02494c46">IT SERVICES MONTHLY REVIEW 
-Reported period : &lt;month, year &gt;
-CONFIDENTIAL  |  
-© 
-2024
- EPAM Systems, Inc.
-IT SERVICE HEALTH : SERVICE VOLUME
-&lt;Diagram with all user’s and monitoring  incidents during reported period ; including count of incidents and resolver assignment group&gt;
-IT SERVICE HEALTH : SERVICE VOLUME
-&lt;Diagram with all service requests during reported period, should include numbers of all INC and SRs tickets during this period.​
-Business meaning:​
-These numbers represent unique tasks that came to each team and required attention and effort.​
-Proposed actions / decisions:​
-Analyzing volume trends correlating with major events;​
-Volume spikes after major events may indicate the need for further research of systemic root causes. &gt;
-3
-Tower (top10)
-Created INC/SR during &lt;repot period&gt;
-Created INC/SR during &lt;repot period&gt;
-Trend
-&lt;Assignment group&gt;
-&lt;number or INC/SR&gt;
-&lt;number or INC/SR&gt;
-&lt;increase / decrease &gt;
-&lt;Assignment group&gt;
-&lt;number or INC/SR&gt;
-&lt;number or INC/SR&gt;
-IT SERVICE HEALTH: &lt;Project&gt; SERVICE VOLUME
-&lt;Diagram with all user’s and monitoring  incidents during reported period for a specific project (not including services covered  by client); including count of incidents and resolver assignment group
-4
-Business meaning:​
-These numbers represent unique tasks that came to each team and required attention and effort.​
-Proposed actions / decisions:​
-Analyzing volume trends correlating with major events;​
-Volume spikes after major events may indicate the need for further research of systemic root causes. &gt;
-IT SERVICE HEALTH: &lt;Project&gt; SERVICE VOLUME
-&lt;Diagram with ALL service requests (opened, resolved, closed) related  to a specific project &gt;
-Business meaning:​
-These numbers represent unique tasks that came to each team and required attention and effort.​
-Proposed actions / decisions:​
-Analyzing volume trends correlating with major events;​
-The number of increased/decreased tickers should be specified, and possible action items proposed.
-5
-6
-IT SERVICE HEALTH: &lt;Project/Team&gt; Incidents’ SLAs
-&lt;Examples&gt;
-Business meaning:​
-This stats will show whether Response and Resolution SLA are within SLA
-.​
-Proposed actions / decisions:​
-Analyzing SLA breaching
-Keep SLAs calibration and monitoring 
-SLA targets:
-&lt;Specify SLA targets for different priority levels &gt;
-&lt;Diagram with Average time for processing different types of priority levels incidents, should contain Average time for processing P1-P4 Incidents &gt;
-7
-IT SERVICE HEALTH: &lt;Project/team&gt; Incidents’ SLAs
-Business meaning:​
-This stats will show whether Response and Resolution SLA are within SLA for different priority levels
-Proposed actions / decisions:​
-Analyzing SLA breaching 
-Keep SLAs calibration and monitoring
-SLA targets:
-P1 &lt;should be specified for each one&gt;
-P2
-P3
-P4
-IT SERVICE HEALTH: &lt;Team/Project&gt; INCs’ and SRs’ SLA 
-8
-&lt;insert the following diagrams/ statistics charts:
-Average processing time for Service Requests, Resolution time for Service requests, Ticket resolution quality 
-Reassignment Compliance&gt;
-Business meaning:​
-This stats will show whether Average processing time of Service Requests is healthy; Reassignment Compliance and Ticket resolution quality (number of reopen)
-Proposed actions / decisions:​
-Analyzing service volume and propose action items if required
-IT SERVICE HEALTH: P0/P1 INCIDENTS
-&lt;Diagram with closed P0/P1 incidents grouped by resolver group&gt;
-P0/P1ticket
-SLA Breached
-Team
-Short Description
-RCA
-Prevention/Mitigation
-9
-Business meaning:​
-These numbers show how many tickets of different Priority are resolved by each group and may provide better understanding of the complexity of incidents,
-Actions / decisions:​
-Analyzing &lt;Analyzing trends may drive DEV effort prioritization of “code improvements” vs “feature development&gt;  &lt;stability of Code , structure , code&gt;
-IT SERVICE HEALTH: TICKET AGE
-&lt;Diagram with all open incidents grouped by Backlog time and diagram with all open incidents grouped by Backlog time and priority: grouped by the following statuses : New, In Progress, On Hold &gt;
-Tower (top 10)
-Age (1+ month)
-10
-Business meaning:​
-Displays the number of days tickets have been open in the system. &lt;open tasks, backlog&gt;
-Actions / decisions:​
-&lt;for future Problem Management &gt;
-IT SERVICE Customer Satisfaction (CSAT)
-&lt;Diagram with statistics and trend line&gt;
-11
-Business meaning:​
-Customer satisfaction and score that indicates how satisfied a customer is with a specific product, transaction, or interaction with a company
-Actions / decisions:​
-Regular monthly CSAT Review 
-SERVICE TOWER: SERVICE DESK
-&lt;only if required &gt;
-Service Volume
-&lt;D
-iagram with total number of Tickets created in ITSM tool vs Tickets accepted by L1 vs First Level resolution (FLR) tickets
-Service SLAs
-&lt;
-Service Desk first call resolution rate of  level 1Support (True/ falls)
-Response SLA for L1 team (True/ falls)
-Tickets Age
-&lt;diagram  with all Open INC+ SR grouped by Backlog time and State (Pending, Open, Work in progress) for L1 Team&gt;
-12
-Key Highlights 
-&lt;specify for reported period &gt;
-Critical issues 
-&lt;specify for reported period &gt;
-SLA target
-&lt;specify for reported period &gt;
-SERVICE TOWER: CHANGE MANAGEMENT 
-&lt;Diagram with all changes groups by statuses which are in ITSM tool&gt;
-13
-Business meaning 
-The number of RFCs
-Actions / decisions:​
-SERVICE TOWER :PROBLEM MANAGEMENT
-&lt;Diagram with all problems groups by statuses which are in ITSM tool&gt;
-14
-Business meaning 
-These numbers may provide better understanding of the complexity of incidents, stability of Code, and overall health of environment 
-Actions / decisions:​
-RISKS
-&lt;Mention all possible risks grouped by a separate tower of service (Service Desk, Change / INC/Problem Management , Different teams within the project )&gt;
-15
-Risks
-Risk Owner
-Impact 
-Description/Impact
-Mitigation
-IT SERVICE IMPROVEMENTS (CSIP)
-Short Description 
-Owner
-Impact
-Date
-16
-Completed This Month
-Planned Next Month 
-Short Description 
-Owner
-Impact
-Date
-THANK YOU!
-17
-</TemplatesTextContent>
-    <SubjectDoc xmlns="a17c10a8-bd22-4f4b-9c5c-c3dc02494c46">Template</SubjectDoc>
-    <FriendlyURL xmlns="a17c10a8-bd22-4f4b-9c5c-c3dc02494c46">files/templates-examples/global-delivery/monthly-review-report.pptx</FriendlyURL>
-    <BriefDescription xmlns="a17c10a8-bd22-4f4b-9c5c-c3dc02494c46">This template is related to Maintenance and Support Guideline and intended to be used for monthly status reporting of maintenance and support project.</BriefDescription>
-    <WorkStorage xmlns="a17c10a8-bd22-4f4b-9c5c-c3dc02494c46">
-      <Url>https://epam.sharepoint.com/sites/policy/work/Shared%20Documents/Work%20Product%20Templates/Continuous%20delivery/Maintenance%20and%20Support</Url>
-      <Description>/sites/policy/work/Shared Documents/Work Product Templates/Continuous delivery/Maintenance and Support</Description>
-    </WorkStorage>
-    <PageName xmlns="a17c10a8-bd22-4f4b-9c5c-c3dc02494c46">
-      <Url>https://policy.epam.com/pages/templates-examples/monthly-review-report</Url>
-      <Description>Template: Monthly Review Report</Description>
-    </PageName>
-    <OrganizationalUnit xmlns="a17c10a8-bd22-4f4b-9c5c-c3dc02494c46">
-      <Url>https://people.epam.com/network/1/8aec5375-fd5e-4dd5-aa02-b9d225a43413/structure</Url>
-      <Description>Delivery Management Office</Description>
-    </OrganizationalUnit>
-    <LocationCountry xmlns="a17c10a8-bd22-4f4b-9c5c-c3dc02494c46">
-      <Value>Global</Value>
-    </LocationCountry>
-    <LastApprovalDate xmlns="a17c10a8-bd22-4f4b-9c5c-c3dc02494c46">2022-12-20T21:00:00+00:00</LastApprovalDate>
-    <LastApproverName xmlns="a17c10a8-bd22-4f4b-9c5c-c3dc02494c46">Dmitry Makeev</LastApproverName>
-    <Standards xmlns="a17c10a8-bd22-4f4b-9c5c-c3dc02494c46">
-      <Value>###</Value>
-    </Standards>
-  </documentManagement>
-</p:properties>
-</file>
-
 <file path=customXml/item4.xml><?xml version="1.0" encoding="utf-8"?>
 <?mso-contentType ?>
-<spe:Receivers xmlns:spe="http://schemas.microsoft.com/sharepoint/events">
-  <Receiver>
-    <Name>Document ID Generator</Name>
-    <Synchronization>Synchronous</Synchronization>
-    <Type>10001</Type>
-    <SequenceNumber>1000</SequenceNumber>
-    <Url/>
-    <Assembly>Microsoft.Office.DocumentManagement, Version=16.0.0.0, Culture=neutral, PublicKeyToken=71e9bce111e9429c</Assembly>
-    <Class>Microsoft.Office.DocumentManagement.Internal.DocIdHandler</Class>
-    <Data/>
-    <Filter/>
-  </Receiver>
-  <Receiver>
-    <Name>Document ID Generator</Name>
-    <Synchronization>Synchronous</Synchronization>
-    <Type>10002</Type>
-    <SequenceNumber>1001</SequenceNumber>
-    <Url/>
-    <Assembly>Microsoft.Office.DocumentManagement, Version=16.0.0.0, Culture=neutral, PublicKeyToken=71e9bce111e9429c</Assembly>
-    <Class>Microsoft.Office.DocumentManagement.Internal.DocIdHandler</Class>
-    <Data/>
-    <Filter/>
-  </Receiver>
-  <Receiver>
-    <Name>Document ID Generator</Name>
-    <Synchronization>Synchronous</Synchronization>
-    <Type>10004</Type>
-    <SequenceNumber>1002</SequenceNumber>
-    <Url/>
-    <Assembly>Microsoft.Office.DocumentManagement, Version=16.0.0.0, Culture=neutral, PublicKeyToken=71e9bce111e9429c</Assembly>
-    <Class>Microsoft.Office.DocumentManagement.Internal.DocIdHandler</Class>
-    <Data/>
-    <Filter/>
-  </Receiver>
-  <Receiver>
-    <Name>Document ID Generator</Name>
-    <Synchronization>Synchronous</Synchronization>
-    <Type>10006</Type>
-    <SequenceNumber>1003</SequenceNumber>
-    <Url/>
-    <Assembly>Microsoft.Office.DocumentManagement, Version=16.0.0.0, Culture=neutral, PublicKeyToken=71e9bce111e9429c</Assembly>
-    <Class>Microsoft.Office.DocumentManagement.Internal.DocIdHandler</Class>
-    <Data/>
-    <Filter/>
-  </Receiver>
-</spe:Receivers>
+<FormTemplates xmlns="http://schemas.microsoft.com/sharepoint/v3/contenttype/forms">
+  <Display>DocumentLibraryForm</Display>
+  <Edit>DocumentLibraryForm</Edit>
+  <New>DocumentLibraryForm</New>
+</FormTemplates>
 </file>
 
 <file path=customXml/itemProps1.xml><?xml version="1.0" encoding="utf-8"?>
-<ds:datastoreItem xmlns:ds="http://schemas.openxmlformats.org/officeDocument/2006/customXml" ds:itemID="{7C112C0A-7F3A-4E28-80B1-4B14EB4F54BD}">
+<ds:datastoreItem xmlns:ds="http://schemas.openxmlformats.org/officeDocument/2006/customXml" ds:itemID="{4A6F74FC-DCE4-4FAD-B152-022B257C5C9F}">
   <ds:schemaRefs>
-    <ds:schemaRef ds:uri="http://schemas.microsoft.com/sharepoint/v3/contenttype/forms"/>
+    <ds:schemaRef ds:uri="http://schemas.microsoft.com/sharepoint/events"/>
   </ds:schemaRefs>
 </ds:datastoreItem>
 </file>
 
 <file path=customXml/itemProps2.xml><?xml version="1.0" encoding="utf-8"?>
-<ds:datastoreItem xmlns:ds="http://schemas.openxmlformats.org/officeDocument/2006/customXml" ds:itemID="{1A413D99-DCF0-4BFE-8F14-77623FB180E9}">
-  <ds:schemaRefs>
-    <ds:schemaRef ds:uri="http://schemas.microsoft.com/office/2006/metadata/contentType"/>
-    <ds:schemaRef ds:uri="http://schemas.microsoft.com/office/2006/metadata/properties/metaAttributes"/>
-    <ds:schemaRef ds:uri="http://www.w3.org/2001/XMLSchema"/>
-    <ds:schemaRef ds:uri="http://schemas.microsoft.com/office/2006/metadata/properties"/>
-    <ds:schemaRef ds:uri="http://schemas.microsoft.com/sharepoint/v3"/>
-    <ds:schemaRef ds:uri="a17c10a8-bd22-4f4b-9c5c-c3dc02494c46"/>
-    <ds:schemaRef ds:uri="2f73596d-a490-4938-9ae7-6f2abd4edc7d"/>
-    <ds:schemaRef ds:uri="http://schemas.microsoft.com/office/2006/documentManagement/types"/>
-    <ds:schemaRef ds:uri="http://schemas.microsoft.com/office/infopath/2007/PartnerControls"/>
-    <ds:schemaRef ds:uri="http://schemas.openxmlformats.org/package/2006/metadata/core-properties"/>
-    <ds:schemaRef ds:uri="http://purl.org/dc/elements/1.1/"/>
-    <ds:schemaRef ds:uri="http://purl.org/dc/terms/"/>
-    <ds:schemaRef ds:uri="http://schemas.microsoft.com/internal/obd"/>
-  </ds:schemaRefs>
-</ds:datastoreItem>
-</file>
-
-<file path=customXml/itemProps3.xml><?xml version="1.0" encoding="utf-8"?>
 <ds:datastoreItem xmlns:ds="http://schemas.openxmlformats.org/officeDocument/2006/customXml" ds:itemID="{A50FA2CC-35CC-4D88-B54E-498208D7C745}">
   <ds:schemaRefs>
     <ds:schemaRef ds:uri="http://purl.org/dc/elements/1.1/"/>
@@ -51017,10 +51581,30 @@
 </ds:datastoreItem>
 </file>
 
+<file path=customXml/itemProps3.xml><?xml version="1.0" encoding="utf-8"?>
+<ds:datastoreItem xmlns:ds="http://schemas.openxmlformats.org/officeDocument/2006/customXml" ds:itemID="{1A413D99-DCF0-4BFE-8F14-77623FB180E9}">
+  <ds:schemaRefs>
+    <ds:schemaRef ds:uri="http://schemas.microsoft.com/office/2006/metadata/contentType"/>
+    <ds:schemaRef ds:uri="http://schemas.microsoft.com/office/2006/metadata/properties/metaAttributes"/>
+    <ds:schemaRef ds:uri="http://www.w3.org/2001/XMLSchema"/>
+    <ds:schemaRef ds:uri="http://schemas.microsoft.com/office/2006/metadata/properties"/>
+    <ds:schemaRef ds:uri="http://schemas.microsoft.com/sharepoint/v3"/>
+    <ds:schemaRef ds:uri="a17c10a8-bd22-4f4b-9c5c-c3dc02494c46"/>
+    <ds:schemaRef ds:uri="2f73596d-a490-4938-9ae7-6f2abd4edc7d"/>
+    <ds:schemaRef ds:uri="http://schemas.microsoft.com/office/2006/documentManagement/types"/>
+    <ds:schemaRef ds:uri="http://schemas.microsoft.com/office/infopath/2007/PartnerControls"/>
+    <ds:schemaRef ds:uri="http://schemas.openxmlformats.org/package/2006/metadata/core-properties"/>
+    <ds:schemaRef ds:uri="http://purl.org/dc/elements/1.1/"/>
+    <ds:schemaRef ds:uri="http://purl.org/dc/terms/"/>
+    <ds:schemaRef ds:uri="http://schemas.microsoft.com/internal/obd"/>
+  </ds:schemaRefs>
+</ds:datastoreItem>
+</file>
+
 <file path=customXml/itemProps4.xml><?xml version="1.0" encoding="utf-8"?>
-<ds:datastoreItem xmlns:ds="http://schemas.openxmlformats.org/officeDocument/2006/customXml" ds:itemID="{4A6F74FC-DCE4-4FAD-B152-022B257C5C9F}">
+<ds:datastoreItem xmlns:ds="http://schemas.openxmlformats.org/officeDocument/2006/customXml" ds:itemID="{7C112C0A-7F3A-4E28-80B1-4B14EB4F54BD}">
   <ds:schemaRefs>
-    <ds:schemaRef ds:uri="http://schemas.microsoft.com/sharepoint/events"/>
+    <ds:schemaRef ds:uri="http://schemas.microsoft.com/sharepoint/v3/contenttype/forms"/>
   </ds:schemaRefs>
 </ds:datastoreItem>
 </file>